--- a/public/lessons/year-6-maths/summer/week-27/describe-translations/teaching-powerpoint-v1.pptx
+++ b/public/lessons/year-6-maths/summer/week-27/describe-translations/teaching-powerpoint-v1.pptx
@@ -2,24 +2,24 @@
 <file path=ppt/presentation.xml><?xml version="1.0" encoding="utf-8"?>
 <p:presentation xmlns:p="http://schemas.openxmlformats.org/presentationml/2006/main">
   <p:sldMasterIdLst>
-    <p:sldMasterId xmlns:r="http://schemas.openxmlformats.org/officeDocument/2006/relationships" id="2147483648" r:id="R96f5e19cbf8e442a"/>
+    <p:sldMasterId xmlns:r="http://schemas.openxmlformats.org/officeDocument/2006/relationships" id="2147483648" r:id="Rf8df44936c234d41"/>
   </p:sldMasterIdLst>
   <p:notesMasterIdLst>
-    <p:notesMasterId xmlns:r="http://schemas.openxmlformats.org/officeDocument/2006/relationships" r:id="R6bf1389fd8954d53"/>
+    <p:notesMasterId xmlns:r="http://schemas.openxmlformats.org/officeDocument/2006/relationships" r:id="Rdaa4247e276c4fdc"/>
   </p:notesMasterIdLst>
   <p:sldIdLst>
-    <p:sldId xmlns:r="http://schemas.openxmlformats.org/officeDocument/2006/relationships" id="256" r:id="Rd922911016844c7f"/>
-    <p:sldId xmlns:r="http://schemas.openxmlformats.org/officeDocument/2006/relationships" id="257" r:id="Rfc1a758147f84691"/>
-    <p:sldId xmlns:r="http://schemas.openxmlformats.org/officeDocument/2006/relationships" id="258" r:id="R8114fcb0aeb34a13"/>
-    <p:sldId xmlns:r="http://schemas.openxmlformats.org/officeDocument/2006/relationships" id="259" r:id="Rb0cad0c84cd648ca"/>
-    <p:sldId xmlns:r="http://schemas.openxmlformats.org/officeDocument/2006/relationships" id="260" r:id="R011804e1425b493b"/>
-    <p:sldId xmlns:r="http://schemas.openxmlformats.org/officeDocument/2006/relationships" id="261" r:id="R0ccbbdb422424f97"/>
-    <p:sldId xmlns:r="http://schemas.openxmlformats.org/officeDocument/2006/relationships" id="262" r:id="Rcc40092861e7437a"/>
-    <p:sldId xmlns:r="http://schemas.openxmlformats.org/officeDocument/2006/relationships" id="263" r:id="Re4abaa29255841f2"/>
-    <p:sldId xmlns:r="http://schemas.openxmlformats.org/officeDocument/2006/relationships" id="264" r:id="Rb32ed46ce83240f4"/>
-    <p:sldId xmlns:r="http://schemas.openxmlformats.org/officeDocument/2006/relationships" id="265" r:id="R99451129a3a44808"/>
-    <p:sldId xmlns:r="http://schemas.openxmlformats.org/officeDocument/2006/relationships" id="266" r:id="R6cefd5067ddf4544"/>
-    <p:sldId xmlns:r="http://schemas.openxmlformats.org/officeDocument/2006/relationships" id="267" r:id="R18d1a105c51e4985"/>
+    <p:sldId xmlns:r="http://schemas.openxmlformats.org/officeDocument/2006/relationships" id="256" r:id="Rf45dd45ee8c042ee"/>
+    <p:sldId xmlns:r="http://schemas.openxmlformats.org/officeDocument/2006/relationships" id="257" r:id="Rbd6eedd876824cdf"/>
+    <p:sldId xmlns:r="http://schemas.openxmlformats.org/officeDocument/2006/relationships" id="258" r:id="R978e7a75cc854fc8"/>
+    <p:sldId xmlns:r="http://schemas.openxmlformats.org/officeDocument/2006/relationships" id="259" r:id="Rf235d2e3c6224ec1"/>
+    <p:sldId xmlns:r="http://schemas.openxmlformats.org/officeDocument/2006/relationships" id="260" r:id="R5fdcac8886804304"/>
+    <p:sldId xmlns:r="http://schemas.openxmlformats.org/officeDocument/2006/relationships" id="261" r:id="Rdb94ec2da7b84202"/>
+    <p:sldId xmlns:r="http://schemas.openxmlformats.org/officeDocument/2006/relationships" id="262" r:id="Rad6550e3dbf641ee"/>
+    <p:sldId xmlns:r="http://schemas.openxmlformats.org/officeDocument/2006/relationships" id="263" r:id="R43d4fb2bb359483b"/>
+    <p:sldId xmlns:r="http://schemas.openxmlformats.org/officeDocument/2006/relationships" id="264" r:id="R7c4dc821e3154969"/>
+    <p:sldId xmlns:r="http://schemas.openxmlformats.org/officeDocument/2006/relationships" id="265" r:id="R383cb6309a844411"/>
+    <p:sldId xmlns:r="http://schemas.openxmlformats.org/officeDocument/2006/relationships" id="266" r:id="Rdc210ff3895c4730"/>
+    <p:sldId xmlns:r="http://schemas.openxmlformats.org/officeDocument/2006/relationships" id="267" r:id="R58f29903a5474b34"/>
   </p:sldIdLst>
   <p:sldSz cx="12192000" cy="6858000"/>
   <p:notesSz cx="6858000" cy="9144000"/>
@@ -873,7 +873,7 @@
           <a:lstStyle xmlns:a="http://schemas.openxmlformats.org/drawingml/2006/main"/>
           <a:p xmlns:a="http://schemas.openxmlformats.org/drawingml/2006/main">
             <a:r>
-              <a:t>I do. Reveal the question, setup and each calculation stage one click at a time. Pupils watch before copying. Model answer: 5 left and 6 up.</a:t>
+              <a:t>I do. Reveal the question, then reveal each mathematical change one click at a time. Point to the numbers and operation that changed before moving to the next line. Final answer: 5 left and 6 up.</a:t>
             </a:r>
           </a:p>
         </p:txBody>
@@ -1291,7 +1291,7 @@
   </p:cSld>
   <p:clrMap bg1="lt1" tx1="dk1" bg2="lt2" tx2="dk2" accent1="accent1" accent2="accent2" accent3="accent3" accent4="accent4" accent5="accent5" accent6="accent6" hlink="hlink" folHlink="folHlink"/>
   <p:sldLayoutIdLst>
-    <p:sldLayoutId xmlns:r="http://schemas.openxmlformats.org/officeDocument/2006/relationships" id="2147483649" r:id="R40664f5040114496"/>
+    <p:sldLayoutId xmlns:r="http://schemas.openxmlformats.org/officeDocument/2006/relationships" id="2147483649" r:id="Ra96b50fe55ae4fac"/>
   </p:sldLayoutIdLst>
   <p:txStyles>
     <p:titleStyle>
@@ -1842,7 +1842,7 @@
           <p:cNvPr id="12" name="">
             <a:extLst xmlns:a="http://schemas.openxmlformats.org/drawingml/2006/main">
               <a:ext uri="{FF2B5EF4-FFF2-40B4-BE49-F238E27FC236}">
-                <a16:creationId xmlns:a16="http://schemas.microsoft.com/office/drawing/2014/main" id="{7EDCC239-4A97-4C7F-A90F-4ACF86F9D4BD}"/>
+                <a16:creationId xmlns:a16="http://schemas.microsoft.com/office/drawing/2014/main" id="{8A85CB24-830A-430B-B1C8-CF579A67ABFB}"/>
               </a:ext>
             </a:extLst>
           </p:cNvPr>
@@ -1874,7 +1874,7 @@
           <p:cNvPr id="2" name="">
             <a:extLst xmlns:a="http://schemas.openxmlformats.org/drawingml/2006/main">
               <a:ext uri="{FF2B5EF4-FFF2-40B4-BE49-F238E27FC236}">
-                <a16:creationId xmlns:a16="http://schemas.microsoft.com/office/drawing/2014/main" id="{89B76A78-C300-4868-9CB7-586BE175CCB5}"/>
+                <a16:creationId xmlns:a16="http://schemas.microsoft.com/office/drawing/2014/main" id="{2D7575EB-9802-40D4-BCB9-5F790746AC0A}"/>
               </a:ext>
             </a:extLst>
           </p:cNvPr>
@@ -1931,7 +1931,7 @@
           <p:cNvPr id="3" name="">
             <a:extLst xmlns:a="http://schemas.openxmlformats.org/drawingml/2006/main">
               <a:ext uri="{FF2B5EF4-FFF2-40B4-BE49-F238E27FC236}">
-                <a16:creationId xmlns:a16="http://schemas.microsoft.com/office/drawing/2014/main" id="{CB44D125-6743-4AC5-9824-5BFB9BFA87D6}"/>
+                <a16:creationId xmlns:a16="http://schemas.microsoft.com/office/drawing/2014/main" id="{59A47DD3-FCFC-4D03-9F5A-2438EE14D022}"/>
               </a:ext>
             </a:extLst>
           </p:cNvPr>
@@ -1965,7 +1965,7 @@
           <p:cNvPr id="4" name="">
             <a:extLst xmlns:a="http://schemas.openxmlformats.org/drawingml/2006/main">
               <a:ext uri="{FF2B5EF4-FFF2-40B4-BE49-F238E27FC236}">
-                <a16:creationId xmlns:a16="http://schemas.microsoft.com/office/drawing/2014/main" id="{6E9CAA6C-E798-4F35-9442-1593895F9DD8}"/>
+                <a16:creationId xmlns:a16="http://schemas.microsoft.com/office/drawing/2014/main" id="{FBC4EAB2-0302-452A-8FD5-38BC65967E5F}"/>
               </a:ext>
             </a:extLst>
           </p:cNvPr>
@@ -2022,7 +2022,7 @@
           <p:cNvPr id="5" name="">
             <a:extLst xmlns:a="http://schemas.openxmlformats.org/drawingml/2006/main">
               <a:ext uri="{FF2B5EF4-FFF2-40B4-BE49-F238E27FC236}">
-                <a16:creationId xmlns:a16="http://schemas.microsoft.com/office/drawing/2014/main" id="{2D44AFA6-5352-4FB8-A363-F43B9AC7CAC4}"/>
+                <a16:creationId xmlns:a16="http://schemas.microsoft.com/office/drawing/2014/main" id="{2D12F36C-FB51-4BD5-94F5-38216A56ADFA}"/>
               </a:ext>
             </a:extLst>
           </p:cNvPr>
@@ -2079,7 +2079,7 @@
           <p:cNvPr id="6" name="">
             <a:extLst xmlns:a="http://schemas.openxmlformats.org/drawingml/2006/main">
               <a:ext uri="{FF2B5EF4-FFF2-40B4-BE49-F238E27FC236}">
-                <a16:creationId xmlns:a16="http://schemas.microsoft.com/office/drawing/2014/main" id="{8522395B-5E28-491F-8026-8CDE7959064F}"/>
+                <a16:creationId xmlns:a16="http://schemas.microsoft.com/office/drawing/2014/main" id="{278680FC-EC67-45F9-B062-BFE4F80FBC59}"/>
               </a:ext>
             </a:extLst>
           </p:cNvPr>
@@ -2113,7 +2113,7 @@
           <p:cNvPr id="7" name="">
             <a:extLst xmlns:a="http://schemas.openxmlformats.org/drawingml/2006/main">
               <a:ext uri="{FF2B5EF4-FFF2-40B4-BE49-F238E27FC236}">
-                <a16:creationId xmlns:a16="http://schemas.microsoft.com/office/drawing/2014/main" id="{397A5971-498E-441E-ADDB-21913B808838}"/>
+                <a16:creationId xmlns:a16="http://schemas.microsoft.com/office/drawing/2014/main" id="{99A3C8B5-1DE8-413D-ABD5-F3ECD1929F36}"/>
               </a:ext>
             </a:extLst>
           </p:cNvPr>
@@ -2170,7 +2170,7 @@
           <p:cNvPr id="8" name="">
             <a:extLst xmlns:a="http://schemas.openxmlformats.org/drawingml/2006/main">
               <a:ext uri="{FF2B5EF4-FFF2-40B4-BE49-F238E27FC236}">
-                <a16:creationId xmlns:a16="http://schemas.microsoft.com/office/drawing/2014/main" id="{067A2A34-BEB9-4DBC-B9FE-D769D27B0FD3}"/>
+                <a16:creationId xmlns:a16="http://schemas.microsoft.com/office/drawing/2014/main" id="{9E577D84-A341-4DBA-8EE6-3D6D2D0A749D}"/>
               </a:ext>
             </a:extLst>
           </p:cNvPr>
@@ -2227,7 +2227,7 @@
           <p:cNvPr id="9" name="">
             <a:extLst xmlns:a="http://schemas.openxmlformats.org/drawingml/2006/main">
               <a:ext uri="{FF2B5EF4-FFF2-40B4-BE49-F238E27FC236}">
-                <a16:creationId xmlns:a16="http://schemas.microsoft.com/office/drawing/2014/main" id="{75514F7A-7B6A-42B9-B8ED-146D2CF24690}"/>
+                <a16:creationId xmlns:a16="http://schemas.microsoft.com/office/drawing/2014/main" id="{466D4ADA-151B-4768-85C5-EA7416D607A1}"/>
               </a:ext>
             </a:extLst>
           </p:cNvPr>
@@ -2284,7 +2284,7 @@
           <p:cNvPr id="10" name="">
             <a:extLst xmlns:a="http://schemas.openxmlformats.org/drawingml/2006/main">
               <a:ext uri="{FF2B5EF4-FFF2-40B4-BE49-F238E27FC236}">
-                <a16:creationId xmlns:a16="http://schemas.microsoft.com/office/drawing/2014/main" id="{3E6F291D-279B-41F6-A5EF-5C0208E11067}"/>
+                <a16:creationId xmlns:a16="http://schemas.microsoft.com/office/drawing/2014/main" id="{FF74BE1A-7928-41D9-9CE6-0B072D129522}"/>
               </a:ext>
             </a:extLst>
           </p:cNvPr>
@@ -2341,7 +2341,7 @@
           <p:cNvPr id="11" name="">
             <a:extLst xmlns:a="http://schemas.openxmlformats.org/drawingml/2006/main">
               <a:ext uri="{FF2B5EF4-FFF2-40B4-BE49-F238E27FC236}">
-                <a16:creationId xmlns:a16="http://schemas.microsoft.com/office/drawing/2014/main" id="{1251366C-6D3A-4021-A12F-7A73424D394B}"/>
+                <a16:creationId xmlns:a16="http://schemas.microsoft.com/office/drawing/2014/main" id="{F628C180-3C3D-49F9-8649-F8940E2751DB}"/>
               </a:ext>
             </a:extLst>
           </p:cNvPr>
@@ -2396,7 +2396,7 @@
     </p:spTree>
     <p:extLst>
       <p:ext uri="{BB962C8B-B14F-4D97-AF65-F5344CB8AC3E}">
-        <p14:creationId xmlns:p14="http://schemas.microsoft.com/office/powerpoint/2010/main" val="1865968913"/>
+        <p14:creationId xmlns:p14="http://schemas.microsoft.com/office/powerpoint/2010/main" val="1269198718"/>
       </p:ext>
     </p:extLst>
   </p:cSld>
@@ -2427,7 +2427,7 @@
           <p:cNvPr id="14" name="">
             <a:extLst xmlns:a="http://schemas.openxmlformats.org/drawingml/2006/main">
               <a:ext uri="{FF2B5EF4-FFF2-40B4-BE49-F238E27FC236}">
-                <a16:creationId xmlns:a16="http://schemas.microsoft.com/office/drawing/2014/main" id="{68D297CE-25FA-430A-A8D6-4B43213003E7}"/>
+                <a16:creationId xmlns:a16="http://schemas.microsoft.com/office/drawing/2014/main" id="{DD358C18-19DF-4D9C-B544-36C8EF33B5B1}"/>
               </a:ext>
             </a:extLst>
           </p:cNvPr>
@@ -2459,7 +2459,7 @@
           <p:cNvPr id="2" name="">
             <a:extLst xmlns:a="http://schemas.openxmlformats.org/drawingml/2006/main">
               <a:ext uri="{FF2B5EF4-FFF2-40B4-BE49-F238E27FC236}">
-                <a16:creationId xmlns:a16="http://schemas.microsoft.com/office/drawing/2014/main" id="{F31363CD-0871-455C-8F02-FD10D54A7703}"/>
+                <a16:creationId xmlns:a16="http://schemas.microsoft.com/office/drawing/2014/main" id="{AFB60286-A5E2-4B06-BFD1-0198321D46AF}"/>
               </a:ext>
             </a:extLst>
           </p:cNvPr>
@@ -2516,7 +2516,7 @@
           <p:cNvPr id="3" name="">
             <a:extLst xmlns:a="http://schemas.openxmlformats.org/drawingml/2006/main">
               <a:ext uri="{FF2B5EF4-FFF2-40B4-BE49-F238E27FC236}">
-                <a16:creationId xmlns:a16="http://schemas.microsoft.com/office/drawing/2014/main" id="{2BD619AA-705C-4D08-9D5A-F7A5056C41A1}"/>
+                <a16:creationId xmlns:a16="http://schemas.microsoft.com/office/drawing/2014/main" id="{6095408E-6851-4211-A528-94A5C1162D11}"/>
               </a:ext>
             </a:extLst>
           </p:cNvPr>
@@ -2548,7 +2548,7 @@
           <p:cNvPr id="4" name="">
             <a:extLst xmlns:a="http://schemas.openxmlformats.org/drawingml/2006/main">
               <a:ext uri="{FF2B5EF4-FFF2-40B4-BE49-F238E27FC236}">
-                <a16:creationId xmlns:a16="http://schemas.microsoft.com/office/drawing/2014/main" id="{228420EA-5EC9-4CAC-9557-D8887EC466B6}"/>
+                <a16:creationId xmlns:a16="http://schemas.microsoft.com/office/drawing/2014/main" id="{060295CE-31FF-462A-91F8-7F3D595A7A7C}"/>
               </a:ext>
             </a:extLst>
           </p:cNvPr>
@@ -2605,7 +2605,7 @@
           <p:cNvPr id="5" name="">
             <a:extLst xmlns:a="http://schemas.openxmlformats.org/drawingml/2006/main">
               <a:ext uri="{FF2B5EF4-FFF2-40B4-BE49-F238E27FC236}">
-                <a16:creationId xmlns:a16="http://schemas.microsoft.com/office/drawing/2014/main" id="{2426CDB8-D728-45FC-93AA-1AF64C8882CB}"/>
+                <a16:creationId xmlns:a16="http://schemas.microsoft.com/office/drawing/2014/main" id="{D9AA357A-DA3E-48C8-9F13-666268777DA1}"/>
               </a:ext>
             </a:extLst>
           </p:cNvPr>
@@ -2662,7 +2662,7 @@
           <p:cNvPr id="6" name="">
             <a:extLst xmlns:a="http://schemas.openxmlformats.org/drawingml/2006/main">
               <a:ext uri="{FF2B5EF4-FFF2-40B4-BE49-F238E27FC236}">
-                <a16:creationId xmlns:a16="http://schemas.microsoft.com/office/drawing/2014/main" id="{777382C1-6716-4CE9-AB32-9A0A289F9AAE}"/>
+                <a16:creationId xmlns:a16="http://schemas.microsoft.com/office/drawing/2014/main" id="{3F6D0A31-A5CF-4508-9735-2D57BBE2D04F}"/>
               </a:ext>
             </a:extLst>
           </p:cNvPr>
@@ -2719,7 +2719,7 @@
           <p:cNvPr id="7" name="">
             <a:extLst xmlns:a="http://schemas.openxmlformats.org/drawingml/2006/main">
               <a:ext uri="{FF2B5EF4-FFF2-40B4-BE49-F238E27FC236}">
-                <a16:creationId xmlns:a16="http://schemas.microsoft.com/office/drawing/2014/main" id="{4729DFE5-532C-4622-B779-FAD020015C22}"/>
+                <a16:creationId xmlns:a16="http://schemas.microsoft.com/office/drawing/2014/main" id="{EAFB8F4C-B926-4FC3-AEB4-A5E843DD1BFC}"/>
               </a:ext>
             </a:extLst>
           </p:cNvPr>
@@ -2751,7 +2751,7 @@
           <p:cNvPr id="8" name="">
             <a:extLst xmlns:a="http://schemas.openxmlformats.org/drawingml/2006/main">
               <a:ext uri="{FF2B5EF4-FFF2-40B4-BE49-F238E27FC236}">
-                <a16:creationId xmlns:a16="http://schemas.microsoft.com/office/drawing/2014/main" id="{2C7DF1E6-232C-461B-A6E0-F0C20D5FD0E7}"/>
+                <a16:creationId xmlns:a16="http://schemas.microsoft.com/office/drawing/2014/main" id="{02718ABD-C1D6-4DEA-85D5-31D5BE7D5129}"/>
               </a:ext>
             </a:extLst>
           </p:cNvPr>
@@ -2808,7 +2808,7 @@
           <p:cNvPr id="9" name="">
             <a:extLst xmlns:a="http://schemas.openxmlformats.org/drawingml/2006/main">
               <a:ext uri="{FF2B5EF4-FFF2-40B4-BE49-F238E27FC236}">
-                <a16:creationId xmlns:a16="http://schemas.microsoft.com/office/drawing/2014/main" id="{171F5320-61B7-47E8-B8AF-6A1122C7F2E9}"/>
+                <a16:creationId xmlns:a16="http://schemas.microsoft.com/office/drawing/2014/main" id="{AF3688C7-3ABA-4AA2-93DC-6063580EBFB5}"/>
               </a:ext>
             </a:extLst>
           </p:cNvPr>
@@ -2865,7 +2865,7 @@
           <p:cNvPr id="10" name="">
             <a:extLst xmlns:a="http://schemas.openxmlformats.org/drawingml/2006/main">
               <a:ext uri="{FF2B5EF4-FFF2-40B4-BE49-F238E27FC236}">
-                <a16:creationId xmlns:a16="http://schemas.microsoft.com/office/drawing/2014/main" id="{2D498FD8-DCDF-4D89-977F-449228073A22}"/>
+                <a16:creationId xmlns:a16="http://schemas.microsoft.com/office/drawing/2014/main" id="{C01E4604-E427-4447-A6B8-0C544603524D}"/>
               </a:ext>
             </a:extLst>
           </p:cNvPr>
@@ -2922,7 +2922,7 @@
           <p:cNvPr id="11" name="">
             <a:extLst xmlns:a="http://schemas.openxmlformats.org/drawingml/2006/main">
               <a:ext uri="{FF2B5EF4-FFF2-40B4-BE49-F238E27FC236}">
-                <a16:creationId xmlns:a16="http://schemas.microsoft.com/office/drawing/2014/main" id="{DEC84FA0-691F-4613-8342-7BDCCD1F774E}"/>
+                <a16:creationId xmlns:a16="http://schemas.microsoft.com/office/drawing/2014/main" id="{576CC78E-780B-4BC5-A6A9-479D3399B142}"/>
               </a:ext>
             </a:extLst>
           </p:cNvPr>
@@ -2979,7 +2979,7 @@
           <p:cNvPr id="12" name="">
             <a:extLst xmlns:a="http://schemas.openxmlformats.org/drawingml/2006/main">
               <a:ext uri="{FF2B5EF4-FFF2-40B4-BE49-F238E27FC236}">
-                <a16:creationId xmlns:a16="http://schemas.microsoft.com/office/drawing/2014/main" id="{50A4C179-0513-4951-9348-7EFEC00B3182}"/>
+                <a16:creationId xmlns:a16="http://schemas.microsoft.com/office/drawing/2014/main" id="{A4089645-26B6-4F2D-9758-41162E3C64F5}"/>
               </a:ext>
             </a:extLst>
           </p:cNvPr>
@@ -3036,7 +3036,7 @@
           <p:cNvPr id="13" name="">
             <a:extLst xmlns:a="http://schemas.openxmlformats.org/drawingml/2006/main">
               <a:ext uri="{FF2B5EF4-FFF2-40B4-BE49-F238E27FC236}">
-                <a16:creationId xmlns:a16="http://schemas.microsoft.com/office/drawing/2014/main" id="{46E1CA04-E3EE-4488-8261-4689DC83082C}"/>
+                <a16:creationId xmlns:a16="http://schemas.microsoft.com/office/drawing/2014/main" id="{B05A4086-0B89-4AED-8E47-F58DB7202C63}"/>
               </a:ext>
             </a:extLst>
           </p:cNvPr>
@@ -3091,7 +3091,7 @@
     </p:spTree>
     <p:extLst>
       <p:ext uri="{BB962C8B-B14F-4D97-AF65-F5344CB8AC3E}">
-        <p14:creationId xmlns:p14="http://schemas.microsoft.com/office/powerpoint/2010/main" val="1455574522"/>
+        <p14:creationId xmlns:p14="http://schemas.microsoft.com/office/powerpoint/2010/main" val="1598030138"/>
       </p:ext>
     </p:extLst>
   </p:cSld>
@@ -3292,7 +3292,7 @@
           <p:cNvPr id="19" name="">
             <a:extLst xmlns:a="http://schemas.openxmlformats.org/drawingml/2006/main">
               <a:ext uri="{FF2B5EF4-FFF2-40B4-BE49-F238E27FC236}">
-                <a16:creationId xmlns:a16="http://schemas.microsoft.com/office/drawing/2014/main" id="{7D08C4B5-564A-484C-BBE9-F75652AF88D9}"/>
+                <a16:creationId xmlns:a16="http://schemas.microsoft.com/office/drawing/2014/main" id="{0D209C51-3C00-4FC7-A1D9-57A792D550FD}"/>
               </a:ext>
             </a:extLst>
           </p:cNvPr>
@@ -3324,7 +3324,7 @@
           <p:cNvPr id="2" name="">
             <a:extLst xmlns:a="http://schemas.openxmlformats.org/drawingml/2006/main">
               <a:ext uri="{FF2B5EF4-FFF2-40B4-BE49-F238E27FC236}">
-                <a16:creationId xmlns:a16="http://schemas.microsoft.com/office/drawing/2014/main" id="{AF7BCA8F-AB67-49FA-8E87-9435729A5F77}"/>
+                <a16:creationId xmlns:a16="http://schemas.microsoft.com/office/drawing/2014/main" id="{3D731254-D4A9-4E40-9A54-C81B3F63E3B9}"/>
               </a:ext>
             </a:extLst>
           </p:cNvPr>
@@ -3381,7 +3381,7 @@
           <p:cNvPr id="3" name="">
             <a:extLst xmlns:a="http://schemas.openxmlformats.org/drawingml/2006/main">
               <a:ext uri="{FF2B5EF4-FFF2-40B4-BE49-F238E27FC236}">
-                <a16:creationId xmlns:a16="http://schemas.microsoft.com/office/drawing/2014/main" id="{7FAC143D-1A1B-4821-88F9-D5B91F01803D}"/>
+                <a16:creationId xmlns:a16="http://schemas.microsoft.com/office/drawing/2014/main" id="{E301D9C0-BD38-45CC-9849-67446C7F7154}"/>
               </a:ext>
             </a:extLst>
           </p:cNvPr>
@@ -3413,7 +3413,7 @@
           <p:cNvPr id="4" name="">
             <a:extLst xmlns:a="http://schemas.openxmlformats.org/drawingml/2006/main">
               <a:ext uri="{FF2B5EF4-FFF2-40B4-BE49-F238E27FC236}">
-                <a16:creationId xmlns:a16="http://schemas.microsoft.com/office/drawing/2014/main" id="{1AA9A7D4-DB18-4914-9433-31D36BC29FA4}"/>
+                <a16:creationId xmlns:a16="http://schemas.microsoft.com/office/drawing/2014/main" id="{17499E82-A8F9-4E7B-9584-1C364562DB41}"/>
               </a:ext>
             </a:extLst>
           </p:cNvPr>
@@ -3470,7 +3470,7 @@
           <p:cNvPr id="5" name="">
             <a:extLst xmlns:a="http://schemas.openxmlformats.org/drawingml/2006/main">
               <a:ext uri="{FF2B5EF4-FFF2-40B4-BE49-F238E27FC236}">
-                <a16:creationId xmlns:a16="http://schemas.microsoft.com/office/drawing/2014/main" id="{E0D193BD-058D-4A54-A427-A1094CAC00FB}"/>
+                <a16:creationId xmlns:a16="http://schemas.microsoft.com/office/drawing/2014/main" id="{315C9480-E472-4953-9599-9441ED9878F7}"/>
               </a:ext>
             </a:extLst>
           </p:cNvPr>
@@ -3527,7 +3527,7 @@
           <p:cNvPr id="6" name="">
             <a:extLst xmlns:a="http://schemas.openxmlformats.org/drawingml/2006/main">
               <a:ext uri="{FF2B5EF4-FFF2-40B4-BE49-F238E27FC236}">
-                <a16:creationId xmlns:a16="http://schemas.microsoft.com/office/drawing/2014/main" id="{267F9CB3-CC99-4260-924B-21D67E3BE62A}"/>
+                <a16:creationId xmlns:a16="http://schemas.microsoft.com/office/drawing/2014/main" id="{95B9BF1F-893C-4A98-8A33-892B05F22522}"/>
               </a:ext>
             </a:extLst>
           </p:cNvPr>
@@ -3584,7 +3584,7 @@
           <p:cNvPr id="7" name="">
             <a:extLst xmlns:a="http://schemas.openxmlformats.org/drawingml/2006/main">
               <a:ext uri="{FF2B5EF4-FFF2-40B4-BE49-F238E27FC236}">
-                <a16:creationId xmlns:a16="http://schemas.microsoft.com/office/drawing/2014/main" id="{936A109A-CFF2-498A-8B61-596347308F07}"/>
+                <a16:creationId xmlns:a16="http://schemas.microsoft.com/office/drawing/2014/main" id="{5F4BFC4C-872A-4CF7-8A97-2302D3964F4E}"/>
               </a:ext>
             </a:extLst>
           </p:cNvPr>
@@ -3616,7 +3616,7 @@
           <p:cNvPr id="8" name="">
             <a:extLst xmlns:a="http://schemas.openxmlformats.org/drawingml/2006/main">
               <a:ext uri="{FF2B5EF4-FFF2-40B4-BE49-F238E27FC236}">
-                <a16:creationId xmlns:a16="http://schemas.microsoft.com/office/drawing/2014/main" id="{21D5E55E-5EC1-4726-9A8B-C1EF24ECEFFF}"/>
+                <a16:creationId xmlns:a16="http://schemas.microsoft.com/office/drawing/2014/main" id="{FEFFFC4D-514A-43B2-9210-16DFE10127B1}"/>
               </a:ext>
             </a:extLst>
           </p:cNvPr>
@@ -3673,7 +3673,7 @@
           <p:cNvPr id="9" name="">
             <a:extLst xmlns:a="http://schemas.openxmlformats.org/drawingml/2006/main">
               <a:ext uri="{FF2B5EF4-FFF2-40B4-BE49-F238E27FC236}">
-                <a16:creationId xmlns:a16="http://schemas.microsoft.com/office/drawing/2014/main" id="{36C697ED-9EB3-4CC9-9D85-5BB3F46BBAE5}"/>
+                <a16:creationId xmlns:a16="http://schemas.microsoft.com/office/drawing/2014/main" id="{7763339E-378E-45ED-BEF7-3D2E84671F0F}"/>
               </a:ext>
             </a:extLst>
           </p:cNvPr>
@@ -3730,7 +3730,7 @@
           <p:cNvPr id="10" name="">
             <a:extLst xmlns:a="http://schemas.openxmlformats.org/drawingml/2006/main">
               <a:ext uri="{FF2B5EF4-FFF2-40B4-BE49-F238E27FC236}">
-                <a16:creationId xmlns:a16="http://schemas.microsoft.com/office/drawing/2014/main" id="{1A977E84-D0F7-47AB-A0B0-76D38D311EB4}"/>
+                <a16:creationId xmlns:a16="http://schemas.microsoft.com/office/drawing/2014/main" id="{D99BD4C0-402F-406C-B373-CCC1E520F2B0}"/>
               </a:ext>
             </a:extLst>
           </p:cNvPr>
@@ -3787,7 +3787,7 @@
           <p:cNvPr id="11" name="">
             <a:extLst xmlns:a="http://schemas.openxmlformats.org/drawingml/2006/main">
               <a:ext uri="{FF2B5EF4-FFF2-40B4-BE49-F238E27FC236}">
-                <a16:creationId xmlns:a16="http://schemas.microsoft.com/office/drawing/2014/main" id="{02BA2FF5-AF90-4AD2-9353-5BEBB36D0F2A}"/>
+                <a16:creationId xmlns:a16="http://schemas.microsoft.com/office/drawing/2014/main" id="{4B993E1F-EE95-4874-AA8B-1FF07362F487}"/>
               </a:ext>
             </a:extLst>
           </p:cNvPr>
@@ -3821,7 +3821,7 @@
           <p:cNvPr id="12" name="">
             <a:extLst xmlns:a="http://schemas.openxmlformats.org/drawingml/2006/main">
               <a:ext uri="{FF2B5EF4-FFF2-40B4-BE49-F238E27FC236}">
-                <a16:creationId xmlns:a16="http://schemas.microsoft.com/office/drawing/2014/main" id="{F64F0E55-61D0-4949-B419-6C9DE24256C2}"/>
+                <a16:creationId xmlns:a16="http://schemas.microsoft.com/office/drawing/2014/main" id="{38D791AC-3364-4D87-8067-0C58D08FE975}"/>
               </a:ext>
             </a:extLst>
           </p:cNvPr>
@@ -3878,7 +3878,7 @@
           <p:cNvPr id="13" name="">
             <a:extLst xmlns:a="http://schemas.openxmlformats.org/drawingml/2006/main">
               <a:ext uri="{FF2B5EF4-FFF2-40B4-BE49-F238E27FC236}">
-                <a16:creationId xmlns:a16="http://schemas.microsoft.com/office/drawing/2014/main" id="{AA8E0353-A754-46B7-9D64-172FD562172B}"/>
+                <a16:creationId xmlns:a16="http://schemas.microsoft.com/office/drawing/2014/main" id="{0683B315-137A-4F80-BF07-E8D384854813}"/>
               </a:ext>
             </a:extLst>
           </p:cNvPr>
@@ -3935,7 +3935,7 @@
           <p:cNvPr id="14" name="">
             <a:extLst xmlns:a="http://schemas.openxmlformats.org/drawingml/2006/main">
               <a:ext uri="{FF2B5EF4-FFF2-40B4-BE49-F238E27FC236}">
-                <a16:creationId xmlns:a16="http://schemas.microsoft.com/office/drawing/2014/main" id="{DBC2AC4A-6301-44A4-B897-42ACBFB0DC5C}"/>
+                <a16:creationId xmlns:a16="http://schemas.microsoft.com/office/drawing/2014/main" id="{761BD60B-0129-4E8B-A22F-C90C78707A60}"/>
               </a:ext>
             </a:extLst>
           </p:cNvPr>
@@ -3992,7 +3992,7 @@
           <p:cNvPr id="15" name="">
             <a:extLst xmlns:a="http://schemas.openxmlformats.org/drawingml/2006/main">
               <a:ext uri="{FF2B5EF4-FFF2-40B4-BE49-F238E27FC236}">
-                <a16:creationId xmlns:a16="http://schemas.microsoft.com/office/drawing/2014/main" id="{615AC405-4000-4A19-8F79-10A6BA747CA7}"/>
+                <a16:creationId xmlns:a16="http://schemas.microsoft.com/office/drawing/2014/main" id="{37B35FBC-2F24-4BF9-B40C-53F749181E4A}"/>
               </a:ext>
             </a:extLst>
           </p:cNvPr>
@@ -4026,7 +4026,7 @@
           <p:cNvPr id="16" name="">
             <a:extLst xmlns:a="http://schemas.openxmlformats.org/drawingml/2006/main">
               <a:ext uri="{FF2B5EF4-FFF2-40B4-BE49-F238E27FC236}">
-                <a16:creationId xmlns:a16="http://schemas.microsoft.com/office/drawing/2014/main" id="{FE55A5ED-2F8F-4E72-8CDB-152AE518AE13}"/>
+                <a16:creationId xmlns:a16="http://schemas.microsoft.com/office/drawing/2014/main" id="{6C02C4B4-152C-4171-8F1F-40FCF831B16D}"/>
               </a:ext>
             </a:extLst>
           </p:cNvPr>
@@ -4083,7 +4083,7 @@
           <p:cNvPr id="17" name="">
             <a:extLst xmlns:a="http://schemas.openxmlformats.org/drawingml/2006/main">
               <a:ext uri="{FF2B5EF4-FFF2-40B4-BE49-F238E27FC236}">
-                <a16:creationId xmlns:a16="http://schemas.microsoft.com/office/drawing/2014/main" id="{EDA461CE-4CD1-4A2D-B40B-41080C655B76}"/>
+                <a16:creationId xmlns:a16="http://schemas.microsoft.com/office/drawing/2014/main" id="{845F6392-97C9-40D6-A05B-82983507EB58}"/>
               </a:ext>
             </a:extLst>
           </p:cNvPr>
@@ -4140,7 +4140,7 @@
           <p:cNvPr id="18" name="">
             <a:extLst xmlns:a="http://schemas.openxmlformats.org/drawingml/2006/main">
               <a:ext uri="{FF2B5EF4-FFF2-40B4-BE49-F238E27FC236}">
-                <a16:creationId xmlns:a16="http://schemas.microsoft.com/office/drawing/2014/main" id="{2CB0CE03-3554-4D41-B529-F06E13AD8422}"/>
+                <a16:creationId xmlns:a16="http://schemas.microsoft.com/office/drawing/2014/main" id="{16E8CB00-0C77-4AC3-A03D-B56E8BB4C9A8}"/>
               </a:ext>
             </a:extLst>
           </p:cNvPr>
@@ -4195,7 +4195,7 @@
     </p:spTree>
     <p:extLst>
       <p:ext uri="{BB962C8B-B14F-4D97-AF65-F5344CB8AC3E}">
-        <p14:creationId xmlns:p14="http://schemas.microsoft.com/office/powerpoint/2010/main" val="672260662"/>
+        <p14:creationId xmlns:p14="http://schemas.microsoft.com/office/powerpoint/2010/main" val="464603049"/>
       </p:ext>
     </p:extLst>
   </p:cSld>
@@ -4350,7 +4350,7 @@
           <p:cNvPr id="23" name="">
             <a:extLst xmlns:a="http://schemas.openxmlformats.org/drawingml/2006/main">
               <a:ext uri="{FF2B5EF4-FFF2-40B4-BE49-F238E27FC236}">
-                <a16:creationId xmlns:a16="http://schemas.microsoft.com/office/drawing/2014/main" id="{9C3B0385-DAEF-43A9-8627-14164A1B5EA8}"/>
+                <a16:creationId xmlns:a16="http://schemas.microsoft.com/office/drawing/2014/main" id="{89A2FECD-FF1B-405A-BCAA-31F18E40A7CD}"/>
               </a:ext>
             </a:extLst>
           </p:cNvPr>
@@ -4382,7 +4382,7 @@
           <p:cNvPr id="2" name="">
             <a:extLst xmlns:a="http://schemas.openxmlformats.org/drawingml/2006/main">
               <a:ext uri="{FF2B5EF4-FFF2-40B4-BE49-F238E27FC236}">
-                <a16:creationId xmlns:a16="http://schemas.microsoft.com/office/drawing/2014/main" id="{3DC013D9-72AF-479A-81AE-8078AD35C843}"/>
+                <a16:creationId xmlns:a16="http://schemas.microsoft.com/office/drawing/2014/main" id="{083AF90C-DAAC-4BEF-9162-A09129E00C6B}"/>
               </a:ext>
             </a:extLst>
           </p:cNvPr>
@@ -4439,7 +4439,7 @@
           <p:cNvPr id="3" name="">
             <a:extLst xmlns:a="http://schemas.openxmlformats.org/drawingml/2006/main">
               <a:ext uri="{FF2B5EF4-FFF2-40B4-BE49-F238E27FC236}">
-                <a16:creationId xmlns:a16="http://schemas.microsoft.com/office/drawing/2014/main" id="{A74F3FC0-CB8F-4637-B775-DC12FD1DD4E5}"/>
+                <a16:creationId xmlns:a16="http://schemas.microsoft.com/office/drawing/2014/main" id="{03BC440B-DE62-4CCC-AE9C-A83B7D09B7AD}"/>
               </a:ext>
             </a:extLst>
           </p:cNvPr>
@@ -4471,7 +4471,7 @@
           <p:cNvPr id="4" name="">
             <a:extLst xmlns:a="http://schemas.openxmlformats.org/drawingml/2006/main">
               <a:ext uri="{FF2B5EF4-FFF2-40B4-BE49-F238E27FC236}">
-                <a16:creationId xmlns:a16="http://schemas.microsoft.com/office/drawing/2014/main" id="{4EF0CAD6-8D09-4AB1-A3DF-572A726B4A8A}"/>
+                <a16:creationId xmlns:a16="http://schemas.microsoft.com/office/drawing/2014/main" id="{B07A8DBC-5C28-4F96-922A-A9B89CB10AED}"/>
               </a:ext>
             </a:extLst>
           </p:cNvPr>
@@ -4528,7 +4528,7 @@
           <p:cNvPr id="5" name="">
             <a:extLst xmlns:a="http://schemas.openxmlformats.org/drawingml/2006/main">
               <a:ext uri="{FF2B5EF4-FFF2-40B4-BE49-F238E27FC236}">
-                <a16:creationId xmlns:a16="http://schemas.microsoft.com/office/drawing/2014/main" id="{0EEE3D05-D127-4715-949F-674AE574F1D1}"/>
+                <a16:creationId xmlns:a16="http://schemas.microsoft.com/office/drawing/2014/main" id="{CF9D332D-1B65-4E08-B461-96DE7DAE593E}"/>
               </a:ext>
             </a:extLst>
           </p:cNvPr>
@@ -4585,7 +4585,7 @@
           <p:cNvPr id="6" name="">
             <a:extLst xmlns:a="http://schemas.openxmlformats.org/drawingml/2006/main">
               <a:ext uri="{FF2B5EF4-FFF2-40B4-BE49-F238E27FC236}">
-                <a16:creationId xmlns:a16="http://schemas.microsoft.com/office/drawing/2014/main" id="{D8FE4F60-E0F3-467E-8E44-CCC99F30063C}"/>
+                <a16:creationId xmlns:a16="http://schemas.microsoft.com/office/drawing/2014/main" id="{78A92BAC-A92C-41A3-8378-AB6FC82F06E7}"/>
               </a:ext>
             </a:extLst>
           </p:cNvPr>
@@ -4642,7 +4642,7 @@
           <p:cNvPr id="7" name="">
             <a:extLst xmlns:a="http://schemas.openxmlformats.org/drawingml/2006/main">
               <a:ext uri="{FF2B5EF4-FFF2-40B4-BE49-F238E27FC236}">
-                <a16:creationId xmlns:a16="http://schemas.microsoft.com/office/drawing/2014/main" id="{213435EF-9EAD-42D2-84BD-08A0472AC231}"/>
+                <a16:creationId xmlns:a16="http://schemas.microsoft.com/office/drawing/2014/main" id="{6241293A-D45C-41CA-8A8E-151A71871C16}"/>
               </a:ext>
             </a:extLst>
           </p:cNvPr>
@@ -4674,7 +4674,7 @@
           <p:cNvPr id="8" name="">
             <a:extLst xmlns:a="http://schemas.openxmlformats.org/drawingml/2006/main">
               <a:ext uri="{FF2B5EF4-FFF2-40B4-BE49-F238E27FC236}">
-                <a16:creationId xmlns:a16="http://schemas.microsoft.com/office/drawing/2014/main" id="{0C5E0CC8-5F30-4311-8661-C6B60FB5D729}"/>
+                <a16:creationId xmlns:a16="http://schemas.microsoft.com/office/drawing/2014/main" id="{5B803F9D-92A9-4333-AE7C-746F52C4B245}"/>
               </a:ext>
             </a:extLst>
           </p:cNvPr>
@@ -4731,7 +4731,7 @@
           <p:cNvPr id="9" name="">
             <a:extLst xmlns:a="http://schemas.openxmlformats.org/drawingml/2006/main">
               <a:ext uri="{FF2B5EF4-FFF2-40B4-BE49-F238E27FC236}">
-                <a16:creationId xmlns:a16="http://schemas.microsoft.com/office/drawing/2014/main" id="{B0B9D2D3-DE1C-41D3-B03B-CE311102A385}"/>
+                <a16:creationId xmlns:a16="http://schemas.microsoft.com/office/drawing/2014/main" id="{B9A1BD41-049B-4CAE-B805-9AD7B3F57228}"/>
               </a:ext>
             </a:extLst>
           </p:cNvPr>
@@ -4788,7 +4788,7 @@
           <p:cNvPr id="10" name="">
             <a:extLst xmlns:a="http://schemas.openxmlformats.org/drawingml/2006/main">
               <a:ext uri="{FF2B5EF4-FFF2-40B4-BE49-F238E27FC236}">
-                <a16:creationId xmlns:a16="http://schemas.microsoft.com/office/drawing/2014/main" id="{9315B70D-C9AC-4789-90CB-5A84FE748215}"/>
+                <a16:creationId xmlns:a16="http://schemas.microsoft.com/office/drawing/2014/main" id="{B9196DD2-CFAB-4A28-8A0D-3A2B975114BC}"/>
               </a:ext>
             </a:extLst>
           </p:cNvPr>
@@ -4822,7 +4822,7 @@
           <p:cNvPr id="11" name="">
             <a:extLst xmlns:a="http://schemas.openxmlformats.org/drawingml/2006/main">
               <a:ext uri="{FF2B5EF4-FFF2-40B4-BE49-F238E27FC236}">
-                <a16:creationId xmlns:a16="http://schemas.microsoft.com/office/drawing/2014/main" id="{2455165A-4CBA-428A-B705-078C7C308788}"/>
+                <a16:creationId xmlns:a16="http://schemas.microsoft.com/office/drawing/2014/main" id="{535BA3E8-3857-4550-A92C-E1C79AC3420F}"/>
               </a:ext>
             </a:extLst>
           </p:cNvPr>
@@ -4854,7 +4854,7 @@
           <p:cNvPr id="12" name="">
             <a:extLst xmlns:a="http://schemas.openxmlformats.org/drawingml/2006/main">
               <a:ext uri="{FF2B5EF4-FFF2-40B4-BE49-F238E27FC236}">
-                <a16:creationId xmlns:a16="http://schemas.microsoft.com/office/drawing/2014/main" id="{09B46EC6-F7B4-427C-AA36-03507C5EE37A}"/>
+                <a16:creationId xmlns:a16="http://schemas.microsoft.com/office/drawing/2014/main" id="{D67935D7-516C-476F-8679-1E9F2B9DB5CA}"/>
               </a:ext>
             </a:extLst>
           </p:cNvPr>
@@ -4911,7 +4911,7 @@
           <p:cNvPr id="13" name="">
             <a:extLst xmlns:a="http://schemas.openxmlformats.org/drawingml/2006/main">
               <a:ext uri="{FF2B5EF4-FFF2-40B4-BE49-F238E27FC236}">
-                <a16:creationId xmlns:a16="http://schemas.microsoft.com/office/drawing/2014/main" id="{DB70639F-8F35-4C51-818C-2EF118E8D2F0}"/>
+                <a16:creationId xmlns:a16="http://schemas.microsoft.com/office/drawing/2014/main" id="{433108A6-722A-4D37-A032-9997B980176F}"/>
               </a:ext>
             </a:extLst>
           </p:cNvPr>
@@ -4968,7 +4968,7 @@
           <p:cNvPr id="14" name="">
             <a:extLst xmlns:a="http://schemas.openxmlformats.org/drawingml/2006/main">
               <a:ext uri="{FF2B5EF4-FFF2-40B4-BE49-F238E27FC236}">
-                <a16:creationId xmlns:a16="http://schemas.microsoft.com/office/drawing/2014/main" id="{4A55D753-6897-409D-8BF4-E5B713925B0D}"/>
+                <a16:creationId xmlns:a16="http://schemas.microsoft.com/office/drawing/2014/main" id="{10870068-07D5-4133-AB8B-00F22EE9C11F}"/>
               </a:ext>
             </a:extLst>
           </p:cNvPr>
@@ -5002,7 +5002,7 @@
           <p:cNvPr id="15" name="">
             <a:extLst xmlns:a="http://schemas.openxmlformats.org/drawingml/2006/main">
               <a:ext uri="{FF2B5EF4-FFF2-40B4-BE49-F238E27FC236}">
-                <a16:creationId xmlns:a16="http://schemas.microsoft.com/office/drawing/2014/main" id="{437A0BB0-BAB2-475B-B4C3-D9A11F629A9D}"/>
+                <a16:creationId xmlns:a16="http://schemas.microsoft.com/office/drawing/2014/main" id="{AD0B4EE8-A1E2-4203-88DA-3E1C9CD0EC7F}"/>
               </a:ext>
             </a:extLst>
           </p:cNvPr>
@@ -5034,7 +5034,7 @@
           <p:cNvPr id="16" name="">
             <a:extLst xmlns:a="http://schemas.openxmlformats.org/drawingml/2006/main">
               <a:ext uri="{FF2B5EF4-FFF2-40B4-BE49-F238E27FC236}">
-                <a16:creationId xmlns:a16="http://schemas.microsoft.com/office/drawing/2014/main" id="{5F611D36-BD16-4CB0-AAFA-5ED8762ED943}"/>
+                <a16:creationId xmlns:a16="http://schemas.microsoft.com/office/drawing/2014/main" id="{FB635ADA-D737-4158-91B2-987285E8BE5E}"/>
               </a:ext>
             </a:extLst>
           </p:cNvPr>
@@ -5091,7 +5091,7 @@
           <p:cNvPr id="17" name="">
             <a:extLst xmlns:a="http://schemas.openxmlformats.org/drawingml/2006/main">
               <a:ext uri="{FF2B5EF4-FFF2-40B4-BE49-F238E27FC236}">
-                <a16:creationId xmlns:a16="http://schemas.microsoft.com/office/drawing/2014/main" id="{8DB51684-A5CD-4627-BAB3-8605A7FDA1ED}"/>
+                <a16:creationId xmlns:a16="http://schemas.microsoft.com/office/drawing/2014/main" id="{CC5FD5FD-B130-488A-B724-EED31412B1A6}"/>
               </a:ext>
             </a:extLst>
           </p:cNvPr>
@@ -5148,7 +5148,7 @@
           <p:cNvPr id="18" name="">
             <a:extLst xmlns:a="http://schemas.openxmlformats.org/drawingml/2006/main">
               <a:ext uri="{FF2B5EF4-FFF2-40B4-BE49-F238E27FC236}">
-                <a16:creationId xmlns:a16="http://schemas.microsoft.com/office/drawing/2014/main" id="{5E37AFCA-7552-41E5-B988-F31C2799E371}"/>
+                <a16:creationId xmlns:a16="http://schemas.microsoft.com/office/drawing/2014/main" id="{79CCB549-EC15-4352-BAF8-4A56AFA9EAF8}"/>
               </a:ext>
             </a:extLst>
           </p:cNvPr>
@@ -5182,7 +5182,7 @@
           <p:cNvPr id="19" name="">
             <a:extLst xmlns:a="http://schemas.openxmlformats.org/drawingml/2006/main">
               <a:ext uri="{FF2B5EF4-FFF2-40B4-BE49-F238E27FC236}">
-                <a16:creationId xmlns:a16="http://schemas.microsoft.com/office/drawing/2014/main" id="{DCFB0292-7C76-4F76-9F8C-BA6C9FCDAA69}"/>
+                <a16:creationId xmlns:a16="http://schemas.microsoft.com/office/drawing/2014/main" id="{09848C39-9EEC-4BB0-AF71-7924B5509F76}"/>
               </a:ext>
             </a:extLst>
           </p:cNvPr>
@@ -5214,7 +5214,7 @@
           <p:cNvPr id="20" name="">
             <a:extLst xmlns:a="http://schemas.openxmlformats.org/drawingml/2006/main">
               <a:ext uri="{FF2B5EF4-FFF2-40B4-BE49-F238E27FC236}">
-                <a16:creationId xmlns:a16="http://schemas.microsoft.com/office/drawing/2014/main" id="{369DF205-A558-46CC-892F-C7775213BC1B}"/>
+                <a16:creationId xmlns:a16="http://schemas.microsoft.com/office/drawing/2014/main" id="{F168FDE9-91E2-4258-8D42-BB8FB00D9F9C}"/>
               </a:ext>
             </a:extLst>
           </p:cNvPr>
@@ -5271,7 +5271,7 @@
           <p:cNvPr id="21" name="">
             <a:extLst xmlns:a="http://schemas.openxmlformats.org/drawingml/2006/main">
               <a:ext uri="{FF2B5EF4-FFF2-40B4-BE49-F238E27FC236}">
-                <a16:creationId xmlns:a16="http://schemas.microsoft.com/office/drawing/2014/main" id="{D69FEA99-B67F-450E-A806-232BCB7D1EF5}"/>
+                <a16:creationId xmlns:a16="http://schemas.microsoft.com/office/drawing/2014/main" id="{26466281-2AC1-4406-AB4A-E2A70930D444}"/>
               </a:ext>
             </a:extLst>
           </p:cNvPr>
@@ -5328,7 +5328,7 @@
           <p:cNvPr id="22" name="">
             <a:extLst xmlns:a="http://schemas.openxmlformats.org/drawingml/2006/main">
               <a:ext uri="{FF2B5EF4-FFF2-40B4-BE49-F238E27FC236}">
-                <a16:creationId xmlns:a16="http://schemas.microsoft.com/office/drawing/2014/main" id="{A854F49F-5D0F-4A6C-B8BB-76F4AED0F600}"/>
+                <a16:creationId xmlns:a16="http://schemas.microsoft.com/office/drawing/2014/main" id="{6AE58491-AB28-4C24-B423-B50DDF384F44}"/>
               </a:ext>
             </a:extLst>
           </p:cNvPr>
@@ -5383,7 +5383,7 @@
     </p:spTree>
     <p:extLst>
       <p:ext uri="{BB962C8B-B14F-4D97-AF65-F5344CB8AC3E}">
-        <p14:creationId xmlns:p14="http://schemas.microsoft.com/office/powerpoint/2010/main" val="582543800"/>
+        <p14:creationId xmlns:p14="http://schemas.microsoft.com/office/powerpoint/2010/main" val="1398007086"/>
       </p:ext>
     </p:extLst>
   </p:cSld>
@@ -5584,7 +5584,7 @@
           <p:cNvPr id="23" name="">
             <a:extLst xmlns:a="http://schemas.openxmlformats.org/drawingml/2006/main">
               <a:ext uri="{FF2B5EF4-FFF2-40B4-BE49-F238E27FC236}">
-                <a16:creationId xmlns:a16="http://schemas.microsoft.com/office/drawing/2014/main" id="{D98497FF-C93F-4BCD-B145-5EE6AB0C0BF5}"/>
+                <a16:creationId xmlns:a16="http://schemas.microsoft.com/office/drawing/2014/main" id="{68A0077B-146E-42BE-A39B-57EFB826DBB1}"/>
               </a:ext>
             </a:extLst>
           </p:cNvPr>
@@ -5616,7 +5616,7 @@
           <p:cNvPr id="2" name="">
             <a:extLst xmlns:a="http://schemas.openxmlformats.org/drawingml/2006/main">
               <a:ext uri="{FF2B5EF4-FFF2-40B4-BE49-F238E27FC236}">
-                <a16:creationId xmlns:a16="http://schemas.microsoft.com/office/drawing/2014/main" id="{6E30A311-FA97-45EC-A378-D23C1FDD8818}"/>
+                <a16:creationId xmlns:a16="http://schemas.microsoft.com/office/drawing/2014/main" id="{E8F294D0-2A67-49E2-9543-9134892E5C5F}"/>
               </a:ext>
             </a:extLst>
           </p:cNvPr>
@@ -5673,7 +5673,7 @@
           <p:cNvPr id="3" name="">
             <a:extLst xmlns:a="http://schemas.openxmlformats.org/drawingml/2006/main">
               <a:ext uri="{FF2B5EF4-FFF2-40B4-BE49-F238E27FC236}">
-                <a16:creationId xmlns:a16="http://schemas.microsoft.com/office/drawing/2014/main" id="{EA55DD17-C8B3-41A4-A2AA-71DF87BC0636}"/>
+                <a16:creationId xmlns:a16="http://schemas.microsoft.com/office/drawing/2014/main" id="{E36922C8-CC80-427D-99BA-CC5E88F79CD5}"/>
               </a:ext>
             </a:extLst>
           </p:cNvPr>
@@ -5705,7 +5705,7 @@
           <p:cNvPr id="4" name="">
             <a:extLst xmlns:a="http://schemas.openxmlformats.org/drawingml/2006/main">
               <a:ext uri="{FF2B5EF4-FFF2-40B4-BE49-F238E27FC236}">
-                <a16:creationId xmlns:a16="http://schemas.microsoft.com/office/drawing/2014/main" id="{BA9F579F-86CF-45FF-A037-3848E08A96D2}"/>
+                <a16:creationId xmlns:a16="http://schemas.microsoft.com/office/drawing/2014/main" id="{7D4F447B-E0D5-421A-A505-A8AC4F6949CD}"/>
               </a:ext>
             </a:extLst>
           </p:cNvPr>
@@ -5762,7 +5762,7 @@
           <p:cNvPr id="5" name="">
             <a:extLst xmlns:a="http://schemas.openxmlformats.org/drawingml/2006/main">
               <a:ext uri="{FF2B5EF4-FFF2-40B4-BE49-F238E27FC236}">
-                <a16:creationId xmlns:a16="http://schemas.microsoft.com/office/drawing/2014/main" id="{151E478D-113C-4089-8FDA-A8DF5BF34FEA}"/>
+                <a16:creationId xmlns:a16="http://schemas.microsoft.com/office/drawing/2014/main" id="{9C8B12AA-2C81-4408-BEB5-A1E613E6A419}"/>
               </a:ext>
             </a:extLst>
           </p:cNvPr>
@@ -5819,7 +5819,7 @@
           <p:cNvPr id="6" name="">
             <a:extLst xmlns:a="http://schemas.openxmlformats.org/drawingml/2006/main">
               <a:ext uri="{FF2B5EF4-FFF2-40B4-BE49-F238E27FC236}">
-                <a16:creationId xmlns:a16="http://schemas.microsoft.com/office/drawing/2014/main" id="{3ED43954-ED62-4E7B-B005-CB690BB1A75D}"/>
+                <a16:creationId xmlns:a16="http://schemas.microsoft.com/office/drawing/2014/main" id="{D2DA2CFB-968E-4CD5-ABFB-DD65A22EC5DC}"/>
               </a:ext>
             </a:extLst>
           </p:cNvPr>
@@ -5876,7 +5876,7 @@
           <p:cNvPr id="7" name="">
             <a:extLst xmlns:a="http://schemas.openxmlformats.org/drawingml/2006/main">
               <a:ext uri="{FF2B5EF4-FFF2-40B4-BE49-F238E27FC236}">
-                <a16:creationId xmlns:a16="http://schemas.microsoft.com/office/drawing/2014/main" id="{C8D664D2-7AC1-4854-9A4E-E63A913F79B5}"/>
+                <a16:creationId xmlns:a16="http://schemas.microsoft.com/office/drawing/2014/main" id="{08F53651-0CA9-467E-8ADE-B5E262224508}"/>
               </a:ext>
             </a:extLst>
           </p:cNvPr>
@@ -5908,7 +5908,7 @@
           <p:cNvPr id="8" name="">
             <a:extLst xmlns:a="http://schemas.openxmlformats.org/drawingml/2006/main">
               <a:ext uri="{FF2B5EF4-FFF2-40B4-BE49-F238E27FC236}">
-                <a16:creationId xmlns:a16="http://schemas.microsoft.com/office/drawing/2014/main" id="{8A9A2B12-D57A-4083-B6F8-CCC5211F57BB}"/>
+                <a16:creationId xmlns:a16="http://schemas.microsoft.com/office/drawing/2014/main" id="{D06D2110-E1C1-4CEE-96D0-1A41EDAA6BE7}"/>
               </a:ext>
             </a:extLst>
           </p:cNvPr>
@@ -5965,7 +5965,7 @@
           <p:cNvPr id="9" name="">
             <a:extLst xmlns:a="http://schemas.openxmlformats.org/drawingml/2006/main">
               <a:ext uri="{FF2B5EF4-FFF2-40B4-BE49-F238E27FC236}">
-                <a16:creationId xmlns:a16="http://schemas.microsoft.com/office/drawing/2014/main" id="{8BA17DF1-97E6-43D4-8880-173218EF52D6}"/>
+                <a16:creationId xmlns:a16="http://schemas.microsoft.com/office/drawing/2014/main" id="{2B3C9B03-0EDB-4630-AD67-9521ACA1E0D7}"/>
               </a:ext>
             </a:extLst>
           </p:cNvPr>
@@ -6022,7 +6022,7 @@
           <p:cNvPr id="10" name="">
             <a:extLst xmlns:a="http://schemas.openxmlformats.org/drawingml/2006/main">
               <a:ext uri="{FF2B5EF4-FFF2-40B4-BE49-F238E27FC236}">
-                <a16:creationId xmlns:a16="http://schemas.microsoft.com/office/drawing/2014/main" id="{A70BA669-BF01-4B3C-B549-51A19BFE3A49}"/>
+                <a16:creationId xmlns:a16="http://schemas.microsoft.com/office/drawing/2014/main" id="{2CD046E4-99EA-40AC-A6FC-A454506B2087}"/>
               </a:ext>
             </a:extLst>
           </p:cNvPr>
@@ -6056,7 +6056,7 @@
           <p:cNvPr id="11" name="">
             <a:extLst xmlns:a="http://schemas.openxmlformats.org/drawingml/2006/main">
               <a:ext uri="{FF2B5EF4-FFF2-40B4-BE49-F238E27FC236}">
-                <a16:creationId xmlns:a16="http://schemas.microsoft.com/office/drawing/2014/main" id="{AAE24267-A132-4297-B863-2A9D7E296E2B}"/>
+                <a16:creationId xmlns:a16="http://schemas.microsoft.com/office/drawing/2014/main" id="{74CCA399-D160-44FA-9A4F-68E9BDD6EAAD}"/>
               </a:ext>
             </a:extLst>
           </p:cNvPr>
@@ -6088,7 +6088,7 @@
           <p:cNvPr id="12" name="">
             <a:extLst xmlns:a="http://schemas.openxmlformats.org/drawingml/2006/main">
               <a:ext uri="{FF2B5EF4-FFF2-40B4-BE49-F238E27FC236}">
-                <a16:creationId xmlns:a16="http://schemas.microsoft.com/office/drawing/2014/main" id="{B3351481-9A66-49AA-B0E8-98EE11E377B4}"/>
+                <a16:creationId xmlns:a16="http://schemas.microsoft.com/office/drawing/2014/main" id="{8CEE446E-3EBC-4500-937C-767407F97A04}"/>
               </a:ext>
             </a:extLst>
           </p:cNvPr>
@@ -6145,7 +6145,7 @@
           <p:cNvPr id="13" name="">
             <a:extLst xmlns:a="http://schemas.openxmlformats.org/drawingml/2006/main">
               <a:ext uri="{FF2B5EF4-FFF2-40B4-BE49-F238E27FC236}">
-                <a16:creationId xmlns:a16="http://schemas.microsoft.com/office/drawing/2014/main" id="{6DE8E00A-A01C-456E-A64A-889F81732675}"/>
+                <a16:creationId xmlns:a16="http://schemas.microsoft.com/office/drawing/2014/main" id="{D19885B6-E245-4D46-9E84-2CC9370905DD}"/>
               </a:ext>
             </a:extLst>
           </p:cNvPr>
@@ -6202,7 +6202,7 @@
           <p:cNvPr id="14" name="">
             <a:extLst xmlns:a="http://schemas.openxmlformats.org/drawingml/2006/main">
               <a:ext uri="{FF2B5EF4-FFF2-40B4-BE49-F238E27FC236}">
-                <a16:creationId xmlns:a16="http://schemas.microsoft.com/office/drawing/2014/main" id="{26C499FF-3235-4D55-90E2-05C16F5AA23E}"/>
+                <a16:creationId xmlns:a16="http://schemas.microsoft.com/office/drawing/2014/main" id="{E990D716-417B-4E41-A79F-583AB353DBBF}"/>
               </a:ext>
             </a:extLst>
           </p:cNvPr>
@@ -6236,7 +6236,7 @@
           <p:cNvPr id="15" name="">
             <a:extLst xmlns:a="http://schemas.openxmlformats.org/drawingml/2006/main">
               <a:ext uri="{FF2B5EF4-FFF2-40B4-BE49-F238E27FC236}">
-                <a16:creationId xmlns:a16="http://schemas.microsoft.com/office/drawing/2014/main" id="{E70F03C0-E9E1-44B5-959A-E4D983492C3B}"/>
+                <a16:creationId xmlns:a16="http://schemas.microsoft.com/office/drawing/2014/main" id="{41E5BF4F-E620-4099-B0BC-A0F69EB049DB}"/>
               </a:ext>
             </a:extLst>
           </p:cNvPr>
@@ -6268,7 +6268,7 @@
           <p:cNvPr id="16" name="">
             <a:extLst xmlns:a="http://schemas.openxmlformats.org/drawingml/2006/main">
               <a:ext uri="{FF2B5EF4-FFF2-40B4-BE49-F238E27FC236}">
-                <a16:creationId xmlns:a16="http://schemas.microsoft.com/office/drawing/2014/main" id="{47B80776-F48B-4F10-BF15-A5C26B03F098}"/>
+                <a16:creationId xmlns:a16="http://schemas.microsoft.com/office/drawing/2014/main" id="{8F88DF7D-6DF4-418F-8120-BCDAB73A8952}"/>
               </a:ext>
             </a:extLst>
           </p:cNvPr>
@@ -6325,7 +6325,7 @@
           <p:cNvPr id="17" name="">
             <a:extLst xmlns:a="http://schemas.openxmlformats.org/drawingml/2006/main">
               <a:ext uri="{FF2B5EF4-FFF2-40B4-BE49-F238E27FC236}">
-                <a16:creationId xmlns:a16="http://schemas.microsoft.com/office/drawing/2014/main" id="{5A639AD6-D2DD-4998-A3F5-17570E3D035A}"/>
+                <a16:creationId xmlns:a16="http://schemas.microsoft.com/office/drawing/2014/main" id="{B7C967C8-21C7-4DC5-8401-B7792C1B629F}"/>
               </a:ext>
             </a:extLst>
           </p:cNvPr>
@@ -6382,7 +6382,7 @@
           <p:cNvPr id="18" name="">
             <a:extLst xmlns:a="http://schemas.openxmlformats.org/drawingml/2006/main">
               <a:ext uri="{FF2B5EF4-FFF2-40B4-BE49-F238E27FC236}">
-                <a16:creationId xmlns:a16="http://schemas.microsoft.com/office/drawing/2014/main" id="{9DDE86B6-923C-4D4D-9D94-94B87B425694}"/>
+                <a16:creationId xmlns:a16="http://schemas.microsoft.com/office/drawing/2014/main" id="{172447D4-C170-440A-9FB3-1D161F7B49E5}"/>
               </a:ext>
             </a:extLst>
           </p:cNvPr>
@@ -6416,7 +6416,7 @@
           <p:cNvPr id="19" name="">
             <a:extLst xmlns:a="http://schemas.openxmlformats.org/drawingml/2006/main">
               <a:ext uri="{FF2B5EF4-FFF2-40B4-BE49-F238E27FC236}">
-                <a16:creationId xmlns:a16="http://schemas.microsoft.com/office/drawing/2014/main" id="{8D0EE50C-A696-4835-8E7C-F41E53306D78}"/>
+                <a16:creationId xmlns:a16="http://schemas.microsoft.com/office/drawing/2014/main" id="{3DEDB354-9288-4519-AA0C-3B656C5A74F7}"/>
               </a:ext>
             </a:extLst>
           </p:cNvPr>
@@ -6448,7 +6448,7 @@
           <p:cNvPr id="20" name="">
             <a:extLst xmlns:a="http://schemas.openxmlformats.org/drawingml/2006/main">
               <a:ext uri="{FF2B5EF4-FFF2-40B4-BE49-F238E27FC236}">
-                <a16:creationId xmlns:a16="http://schemas.microsoft.com/office/drawing/2014/main" id="{90313FCC-6BEE-4B6A-890B-75D726FD46FA}"/>
+                <a16:creationId xmlns:a16="http://schemas.microsoft.com/office/drawing/2014/main" id="{ECB06D60-1BF5-4AFA-A545-3F03AD98DDB0}"/>
               </a:ext>
             </a:extLst>
           </p:cNvPr>
@@ -6505,7 +6505,7 @@
           <p:cNvPr id="21" name="">
             <a:extLst xmlns:a="http://schemas.openxmlformats.org/drawingml/2006/main">
               <a:ext uri="{FF2B5EF4-FFF2-40B4-BE49-F238E27FC236}">
-                <a16:creationId xmlns:a16="http://schemas.microsoft.com/office/drawing/2014/main" id="{3FCC534C-4856-4462-A6E8-E9CB66AFCD77}"/>
+                <a16:creationId xmlns:a16="http://schemas.microsoft.com/office/drawing/2014/main" id="{15370D23-0F5E-4331-BE24-A8AABF3DC06E}"/>
               </a:ext>
             </a:extLst>
           </p:cNvPr>
@@ -6562,7 +6562,7 @@
           <p:cNvPr id="22" name="">
             <a:extLst xmlns:a="http://schemas.openxmlformats.org/drawingml/2006/main">
               <a:ext uri="{FF2B5EF4-FFF2-40B4-BE49-F238E27FC236}">
-                <a16:creationId xmlns:a16="http://schemas.microsoft.com/office/drawing/2014/main" id="{11584D38-308A-4BEF-A7A0-5D387E78D299}"/>
+                <a16:creationId xmlns:a16="http://schemas.microsoft.com/office/drawing/2014/main" id="{9B0F4B60-534C-48DC-8818-842CEE3F3FEA}"/>
               </a:ext>
             </a:extLst>
           </p:cNvPr>
@@ -6617,7 +6617,7 @@
     </p:spTree>
     <p:extLst>
       <p:ext uri="{BB962C8B-B14F-4D97-AF65-F5344CB8AC3E}">
-        <p14:creationId xmlns:p14="http://schemas.microsoft.com/office/powerpoint/2010/main" val="209535585"/>
+        <p14:creationId xmlns:p14="http://schemas.microsoft.com/office/powerpoint/2010/main" val="548383708"/>
       </p:ext>
     </p:extLst>
   </p:cSld>
@@ -6818,7 +6818,7 @@
           <p:cNvPr id="16" name="">
             <a:extLst xmlns:a="http://schemas.openxmlformats.org/drawingml/2006/main">
               <a:ext uri="{FF2B5EF4-FFF2-40B4-BE49-F238E27FC236}">
-                <a16:creationId xmlns:a16="http://schemas.microsoft.com/office/drawing/2014/main" id="{EF32B300-9B5E-4A66-A0E6-944BA67B48A3}"/>
+                <a16:creationId xmlns:a16="http://schemas.microsoft.com/office/drawing/2014/main" id="{12167DFC-CA66-4E97-9C8C-AF3C84B88A84}"/>
               </a:ext>
             </a:extLst>
           </p:cNvPr>
@@ -6850,7 +6850,7 @@
           <p:cNvPr id="2" name="">
             <a:extLst xmlns:a="http://schemas.openxmlformats.org/drawingml/2006/main">
               <a:ext uri="{FF2B5EF4-FFF2-40B4-BE49-F238E27FC236}">
-                <a16:creationId xmlns:a16="http://schemas.microsoft.com/office/drawing/2014/main" id="{64E08F15-4FD2-4E58-A186-94161204A899}"/>
+                <a16:creationId xmlns:a16="http://schemas.microsoft.com/office/drawing/2014/main" id="{EAAE590C-7FF7-426F-828C-50997A236724}"/>
               </a:ext>
             </a:extLst>
           </p:cNvPr>
@@ -6907,7 +6907,7 @@
           <p:cNvPr id="3" name="">
             <a:extLst xmlns:a="http://schemas.openxmlformats.org/drawingml/2006/main">
               <a:ext uri="{FF2B5EF4-FFF2-40B4-BE49-F238E27FC236}">
-                <a16:creationId xmlns:a16="http://schemas.microsoft.com/office/drawing/2014/main" id="{31AA305F-78A3-4AD0-A04C-33FD0EBCB052}"/>
+                <a16:creationId xmlns:a16="http://schemas.microsoft.com/office/drawing/2014/main" id="{826FC32F-E865-4393-A849-9B80CA499029}"/>
               </a:ext>
             </a:extLst>
           </p:cNvPr>
@@ -6939,7 +6939,7 @@
           <p:cNvPr id="4" name="">
             <a:extLst xmlns:a="http://schemas.openxmlformats.org/drawingml/2006/main">
               <a:ext uri="{FF2B5EF4-FFF2-40B4-BE49-F238E27FC236}">
-                <a16:creationId xmlns:a16="http://schemas.microsoft.com/office/drawing/2014/main" id="{4FD73932-3839-4E8D-9543-04C752662D36}"/>
+                <a16:creationId xmlns:a16="http://schemas.microsoft.com/office/drawing/2014/main" id="{19AC2052-EFD5-4059-9F0C-9756389F76D8}"/>
               </a:ext>
             </a:extLst>
           </p:cNvPr>
@@ -6996,7 +6996,7 @@
           <p:cNvPr id="5" name="">
             <a:extLst xmlns:a="http://schemas.openxmlformats.org/drawingml/2006/main">
               <a:ext uri="{FF2B5EF4-FFF2-40B4-BE49-F238E27FC236}">
-                <a16:creationId xmlns:a16="http://schemas.microsoft.com/office/drawing/2014/main" id="{85417E6E-0AB6-4389-897A-C283F38DF68A}"/>
+                <a16:creationId xmlns:a16="http://schemas.microsoft.com/office/drawing/2014/main" id="{2AED7694-2065-4126-8DA8-D1F290F35CB9}"/>
               </a:ext>
             </a:extLst>
           </p:cNvPr>
@@ -7053,7 +7053,7 @@
           <p:cNvPr id="6" name="">
             <a:extLst xmlns:a="http://schemas.openxmlformats.org/drawingml/2006/main">
               <a:ext uri="{FF2B5EF4-FFF2-40B4-BE49-F238E27FC236}">
-                <a16:creationId xmlns:a16="http://schemas.microsoft.com/office/drawing/2014/main" id="{B7BFB2B7-55BD-4984-9DA8-83821AE38FE7}"/>
+                <a16:creationId xmlns:a16="http://schemas.microsoft.com/office/drawing/2014/main" id="{3FCF6F11-7F59-4598-952F-6578487A75DA}"/>
               </a:ext>
             </a:extLst>
           </p:cNvPr>
@@ -7110,7 +7110,7 @@
           <p:cNvPr id="7" name="">
             <a:extLst xmlns:a="http://schemas.openxmlformats.org/drawingml/2006/main">
               <a:ext uri="{FF2B5EF4-FFF2-40B4-BE49-F238E27FC236}">
-                <a16:creationId xmlns:a16="http://schemas.microsoft.com/office/drawing/2014/main" id="{B9538A8C-30E7-422F-98FC-0FBBA2CCF5BC}"/>
+                <a16:creationId xmlns:a16="http://schemas.microsoft.com/office/drawing/2014/main" id="{2D13B1B1-A227-4038-A6BE-0F363E0CEC55}"/>
               </a:ext>
             </a:extLst>
           </p:cNvPr>
@@ -7142,7 +7142,7 @@
           <p:cNvPr id="8" name="">
             <a:extLst xmlns:a="http://schemas.openxmlformats.org/drawingml/2006/main">
               <a:ext uri="{FF2B5EF4-FFF2-40B4-BE49-F238E27FC236}">
-                <a16:creationId xmlns:a16="http://schemas.microsoft.com/office/drawing/2014/main" id="{165B0BAC-279B-496B-82CE-30AC17F091FA}"/>
+                <a16:creationId xmlns:a16="http://schemas.microsoft.com/office/drawing/2014/main" id="{43CF5522-0372-4201-A708-3C8B8F9B58B9}"/>
               </a:ext>
             </a:extLst>
           </p:cNvPr>
@@ -7199,7 +7199,7 @@
           <p:cNvPr id="9" name="">
             <a:extLst xmlns:a="http://schemas.openxmlformats.org/drawingml/2006/main">
               <a:ext uri="{FF2B5EF4-FFF2-40B4-BE49-F238E27FC236}">
-                <a16:creationId xmlns:a16="http://schemas.microsoft.com/office/drawing/2014/main" id="{EC008CB9-5B9F-433C-9A37-4EEADE4686E9}"/>
+                <a16:creationId xmlns:a16="http://schemas.microsoft.com/office/drawing/2014/main" id="{BEF989E1-B42B-4E15-962E-076DDFA9FE23}"/>
               </a:ext>
             </a:extLst>
           </p:cNvPr>
@@ -7256,7 +7256,7 @@
           <p:cNvPr id="10" name="">
             <a:extLst xmlns:a="http://schemas.openxmlformats.org/drawingml/2006/main">
               <a:ext uri="{FF2B5EF4-FFF2-40B4-BE49-F238E27FC236}">
-                <a16:creationId xmlns:a16="http://schemas.microsoft.com/office/drawing/2014/main" id="{37BC4CE3-675D-4045-BAF0-948C360C3004}"/>
+                <a16:creationId xmlns:a16="http://schemas.microsoft.com/office/drawing/2014/main" id="{5AD16C3A-020F-4903-9B7E-C43BDFD0C431}"/>
               </a:ext>
             </a:extLst>
           </p:cNvPr>
@@ -7313,7 +7313,7 @@
           <p:cNvPr id="11" name="">
             <a:extLst xmlns:a="http://schemas.openxmlformats.org/drawingml/2006/main">
               <a:ext uri="{FF2B5EF4-FFF2-40B4-BE49-F238E27FC236}">
-                <a16:creationId xmlns:a16="http://schemas.microsoft.com/office/drawing/2014/main" id="{54259E11-918F-4821-A7D3-738746DF073F}"/>
+                <a16:creationId xmlns:a16="http://schemas.microsoft.com/office/drawing/2014/main" id="{EBE22E6A-5133-4BFB-B323-2D78194D3552}"/>
               </a:ext>
             </a:extLst>
           </p:cNvPr>
@@ -7345,7 +7345,7 @@
           <p:cNvPr id="12" name="">
             <a:extLst xmlns:a="http://schemas.openxmlformats.org/drawingml/2006/main">
               <a:ext uri="{FF2B5EF4-FFF2-40B4-BE49-F238E27FC236}">
-                <a16:creationId xmlns:a16="http://schemas.microsoft.com/office/drawing/2014/main" id="{A07AD020-26B3-42FE-8DBF-F5B611C04795}"/>
+                <a16:creationId xmlns:a16="http://schemas.microsoft.com/office/drawing/2014/main" id="{322D06E6-5F29-49B5-A20F-89ECD7B49E7A}"/>
               </a:ext>
             </a:extLst>
           </p:cNvPr>
@@ -7402,7 +7402,7 @@
           <p:cNvPr id="13" name="">
             <a:extLst xmlns:a="http://schemas.openxmlformats.org/drawingml/2006/main">
               <a:ext uri="{FF2B5EF4-FFF2-40B4-BE49-F238E27FC236}">
-                <a16:creationId xmlns:a16="http://schemas.microsoft.com/office/drawing/2014/main" id="{647FC8FE-999F-4A2E-88A3-9E2D7CC54842}"/>
+                <a16:creationId xmlns:a16="http://schemas.microsoft.com/office/drawing/2014/main" id="{DDC0FFBA-376E-400E-B49C-A2F0C7FD0207}"/>
               </a:ext>
             </a:extLst>
           </p:cNvPr>
@@ -7459,7 +7459,7 @@
           <p:cNvPr id="14" name="">
             <a:extLst xmlns:a="http://schemas.openxmlformats.org/drawingml/2006/main">
               <a:ext uri="{FF2B5EF4-FFF2-40B4-BE49-F238E27FC236}">
-                <a16:creationId xmlns:a16="http://schemas.microsoft.com/office/drawing/2014/main" id="{821A8877-B4AD-46A8-A176-9259CA56B8E1}"/>
+                <a16:creationId xmlns:a16="http://schemas.microsoft.com/office/drawing/2014/main" id="{001E5A85-06E6-4CE2-BC98-4D74579B0F7D}"/>
               </a:ext>
             </a:extLst>
           </p:cNvPr>
@@ -7516,7 +7516,7 @@
           <p:cNvPr id="15" name="">
             <a:extLst xmlns:a="http://schemas.openxmlformats.org/drawingml/2006/main">
               <a:ext uri="{FF2B5EF4-FFF2-40B4-BE49-F238E27FC236}">
-                <a16:creationId xmlns:a16="http://schemas.microsoft.com/office/drawing/2014/main" id="{F2146329-DE01-464F-A33B-CBE329073A53}"/>
+                <a16:creationId xmlns:a16="http://schemas.microsoft.com/office/drawing/2014/main" id="{02CFD94E-A9F0-4A94-8B0C-8EF2B7EDC49A}"/>
               </a:ext>
             </a:extLst>
           </p:cNvPr>
@@ -7571,7 +7571,7 @@
     </p:spTree>
     <p:extLst>
       <p:ext uri="{BB962C8B-B14F-4D97-AF65-F5344CB8AC3E}">
-        <p14:creationId xmlns:p14="http://schemas.microsoft.com/office/powerpoint/2010/main" val="743943325"/>
+        <p14:creationId xmlns:p14="http://schemas.microsoft.com/office/powerpoint/2010/main" val="1578079593"/>
       </p:ext>
     </p:extLst>
   </p:cSld>
@@ -7772,7 +7772,7 @@
           <p:cNvPr id="23" name="">
             <a:extLst xmlns:a="http://schemas.openxmlformats.org/drawingml/2006/main">
               <a:ext uri="{FF2B5EF4-FFF2-40B4-BE49-F238E27FC236}">
-                <a16:creationId xmlns:a16="http://schemas.microsoft.com/office/drawing/2014/main" id="{66A57AD4-9A16-4567-B4E4-1D010D474AF6}"/>
+                <a16:creationId xmlns:a16="http://schemas.microsoft.com/office/drawing/2014/main" id="{91C67660-DF94-465D-9C03-03DEF3AADF45}"/>
               </a:ext>
             </a:extLst>
           </p:cNvPr>
@@ -7804,7 +7804,7 @@
           <p:cNvPr id="2" name="">
             <a:extLst xmlns:a="http://schemas.openxmlformats.org/drawingml/2006/main">
               <a:ext uri="{FF2B5EF4-FFF2-40B4-BE49-F238E27FC236}">
-                <a16:creationId xmlns:a16="http://schemas.microsoft.com/office/drawing/2014/main" id="{E5BEC190-27EE-4990-A3B1-918CDB62F9CE}"/>
+                <a16:creationId xmlns:a16="http://schemas.microsoft.com/office/drawing/2014/main" id="{9BD734A0-C914-4F0F-A926-4680BDD4F027}"/>
               </a:ext>
             </a:extLst>
           </p:cNvPr>
@@ -7861,7 +7861,7 @@
           <p:cNvPr id="3" name="">
             <a:extLst xmlns:a="http://schemas.openxmlformats.org/drawingml/2006/main">
               <a:ext uri="{FF2B5EF4-FFF2-40B4-BE49-F238E27FC236}">
-                <a16:creationId xmlns:a16="http://schemas.microsoft.com/office/drawing/2014/main" id="{DE081587-C0E9-4763-B163-9F19830A3B61}"/>
+                <a16:creationId xmlns:a16="http://schemas.microsoft.com/office/drawing/2014/main" id="{65B456BC-473E-4C33-B19A-B4B1AE6090E3}"/>
               </a:ext>
             </a:extLst>
           </p:cNvPr>
@@ -7893,7 +7893,7 @@
           <p:cNvPr id="4" name="">
             <a:extLst xmlns:a="http://schemas.openxmlformats.org/drawingml/2006/main">
               <a:ext uri="{FF2B5EF4-FFF2-40B4-BE49-F238E27FC236}">
-                <a16:creationId xmlns:a16="http://schemas.microsoft.com/office/drawing/2014/main" id="{83516FA9-DEDE-45A4-BBAA-24A36334CCE8}"/>
+                <a16:creationId xmlns:a16="http://schemas.microsoft.com/office/drawing/2014/main" id="{19434E04-653C-4E7E-8774-7DB8163BDD4A}"/>
               </a:ext>
             </a:extLst>
           </p:cNvPr>
@@ -7950,7 +7950,7 @@
           <p:cNvPr id="5" name="">
             <a:extLst xmlns:a="http://schemas.openxmlformats.org/drawingml/2006/main">
               <a:ext uri="{FF2B5EF4-FFF2-40B4-BE49-F238E27FC236}">
-                <a16:creationId xmlns:a16="http://schemas.microsoft.com/office/drawing/2014/main" id="{3493349B-D14C-4B6F-B668-5786B2FA9C68}"/>
+                <a16:creationId xmlns:a16="http://schemas.microsoft.com/office/drawing/2014/main" id="{9B50CB05-5173-4F74-8CA4-5399B40BCEEA}"/>
               </a:ext>
             </a:extLst>
           </p:cNvPr>
@@ -8007,7 +8007,7 @@
           <p:cNvPr id="6" name="">
             <a:extLst xmlns:a="http://schemas.openxmlformats.org/drawingml/2006/main">
               <a:ext uri="{FF2B5EF4-FFF2-40B4-BE49-F238E27FC236}">
-                <a16:creationId xmlns:a16="http://schemas.microsoft.com/office/drawing/2014/main" id="{EF1C7B9C-ABF2-47F1-83FC-08171B1BB8F9}"/>
+                <a16:creationId xmlns:a16="http://schemas.microsoft.com/office/drawing/2014/main" id="{BBC85873-43C6-4C4D-A9BD-AC3BCDDAA927}"/>
               </a:ext>
             </a:extLst>
           </p:cNvPr>
@@ -8064,7 +8064,7 @@
           <p:cNvPr id="7" name="">
             <a:extLst xmlns:a="http://schemas.openxmlformats.org/drawingml/2006/main">
               <a:ext uri="{FF2B5EF4-FFF2-40B4-BE49-F238E27FC236}">
-                <a16:creationId xmlns:a16="http://schemas.microsoft.com/office/drawing/2014/main" id="{EC6C99E8-AFDF-49FE-8DF9-A09928E45CD5}"/>
+                <a16:creationId xmlns:a16="http://schemas.microsoft.com/office/drawing/2014/main" id="{0DBA917D-FF77-4D6F-B0FF-51B039EEACE1}"/>
               </a:ext>
             </a:extLst>
           </p:cNvPr>
@@ -8096,7 +8096,7 @@
           <p:cNvPr id="8" name="">
             <a:extLst xmlns:a="http://schemas.openxmlformats.org/drawingml/2006/main">
               <a:ext uri="{FF2B5EF4-FFF2-40B4-BE49-F238E27FC236}">
-                <a16:creationId xmlns:a16="http://schemas.microsoft.com/office/drawing/2014/main" id="{57DF66A0-A146-4C8E-9ADF-7D8C00F6B120}"/>
+                <a16:creationId xmlns:a16="http://schemas.microsoft.com/office/drawing/2014/main" id="{37FD8AAE-9D8C-4946-B05D-DE46EB954F6F}"/>
               </a:ext>
             </a:extLst>
           </p:cNvPr>
@@ -8153,7 +8153,7 @@
           <p:cNvPr id="9" name="">
             <a:extLst xmlns:a="http://schemas.openxmlformats.org/drawingml/2006/main">
               <a:ext uri="{FF2B5EF4-FFF2-40B4-BE49-F238E27FC236}">
-                <a16:creationId xmlns:a16="http://schemas.microsoft.com/office/drawing/2014/main" id="{F767B6AA-D1B9-47F5-94D8-685BFFF1C356}"/>
+                <a16:creationId xmlns:a16="http://schemas.microsoft.com/office/drawing/2014/main" id="{13F24EAE-2CC4-4739-A0D8-82EFDFEDAFFA}"/>
               </a:ext>
             </a:extLst>
           </p:cNvPr>
@@ -8210,19 +8210,19 @@
           <p:cNvPr id="10" name="">
             <a:extLst xmlns:a="http://schemas.openxmlformats.org/drawingml/2006/main">
               <a:ext uri="{FF2B5EF4-FFF2-40B4-BE49-F238E27FC236}">
-                <a16:creationId xmlns:a16="http://schemas.microsoft.com/office/drawing/2014/main" id="{0D4B4787-86DE-46A5-9D53-AFCB9A1A5481}"/>
-              </a:ext>
-            </a:extLst>
-          </p:cNvPr>
-          <p:cNvSpPr>
-            <a:spLocks xmlns:a="http://schemas.openxmlformats.org/drawingml/2006/main" noGrp="1"/>
-          </p:cNvSpPr>
-          <p:nvPr/>
-        </p:nvSpPr>
-        <p:spPr>
-          <a:xfrm xmlns:a="http://schemas.openxmlformats.org/drawingml/2006/main">
-            <a:off x="914400" y="1257300"/>
-            <a:ext cx="10363200" cy="781050"/>
+                <a16:creationId xmlns:a16="http://schemas.microsoft.com/office/drawing/2014/main" id="{B7B21FA6-D175-48D7-81E0-CB043EC59A58}"/>
+              </a:ext>
+            </a:extLst>
+          </p:cNvPr>
+          <p:cNvSpPr>
+            <a:spLocks xmlns:a="http://schemas.openxmlformats.org/drawingml/2006/main" noGrp="1"/>
+          </p:cNvSpPr>
+          <p:nvPr/>
+        </p:nvSpPr>
+        <p:spPr>
+          <a:xfrm xmlns:a="http://schemas.openxmlformats.org/drawingml/2006/main">
+            <a:off x="857250" y="1219200"/>
+            <a:ext cx="10477500" cy="742950"/>
           </a:xfrm>
           <a:prstGeom xmlns:a="http://schemas.openxmlformats.org/drawingml/2006/main" prst="rect">
             <a:avLst/>
@@ -8239,7 +8239,7 @@
           <a:lstStyle xmlns:a="http://schemas.openxmlformats.org/drawingml/2006/main"/>
           <a:p xmlns:a="http://schemas.openxmlformats.org/drawingml/2006/main">
             <a:pPr algn="ctr">
-              <a:defRPr sz="2175" b="1">
+              <a:defRPr sz="2100" b="1">
                 <a:solidFill>
                   <a:srgbClr val="17253A"/>
                 </a:solidFill>
@@ -8249,7 +8249,7 @@
               </a:defRPr>
             </a:pPr>
             <a:r>
-              <a:rPr sz="2175" b="1">
+              <a:rPr sz="2100" b="1">
                 <a:solidFill>
                   <a:srgbClr val="17253A"/>
                 </a:solidFill>
@@ -8267,28 +8267,30 @@
           <p:cNvPr id="11" name="">
             <a:extLst xmlns:a="http://schemas.openxmlformats.org/drawingml/2006/main">
               <a:ext uri="{FF2B5EF4-FFF2-40B4-BE49-F238E27FC236}">
-                <a16:creationId xmlns:a16="http://schemas.microsoft.com/office/drawing/2014/main" id="{1841AD7B-E526-4049-85C4-534BBB741EA3}"/>
-              </a:ext>
-            </a:extLst>
-          </p:cNvPr>
-          <p:cNvSpPr>
-            <a:spLocks xmlns:a="http://schemas.openxmlformats.org/drawingml/2006/main" noGrp="1"/>
-          </p:cNvSpPr>
-          <p:nvPr/>
-        </p:nvSpPr>
-        <p:spPr>
-          <a:xfrm xmlns:a="http://schemas.openxmlformats.org/drawingml/2006/main">
-            <a:off x="1000125" y="2247900"/>
-            <a:ext cx="476250" cy="476250"/>
-          </a:xfrm>
-          <a:prstGeom xmlns:a="http://schemas.openxmlformats.org/drawingml/2006/main" prst="ellipse">
+                <a16:creationId xmlns:a16="http://schemas.microsoft.com/office/drawing/2014/main" id="{D6924744-26F0-44CF-AAE6-E7E77C878010}"/>
+              </a:ext>
+            </a:extLst>
+          </p:cNvPr>
+          <p:cNvSpPr>
+            <a:spLocks xmlns:a="http://schemas.openxmlformats.org/drawingml/2006/main" noGrp="1"/>
+          </p:cNvSpPr>
+          <p:nvPr/>
+        </p:nvSpPr>
+        <p:spPr>
+          <a:xfrm xmlns:a="http://schemas.openxmlformats.org/drawingml/2006/main">
+            <a:off x="971550" y="2124075"/>
+            <a:ext cx="38100" cy="3524250"/>
+          </a:xfrm>
+          <a:prstGeom xmlns:a="http://schemas.openxmlformats.org/drawingml/2006/main" prst="rect">
             <a:avLst/>
           </a:prstGeom>
           <a:solidFill xmlns:a="http://schemas.openxmlformats.org/drawingml/2006/main">
-            <a:srgbClr val="18324A"/>
+            <a:srgbClr val="2C6E73"/>
           </a:solidFill>
           <a:ln xmlns:a="http://schemas.openxmlformats.org/drawingml/2006/main" w="0">
-            <a:noFill/>
+            <a:solidFill>
+              <a:srgbClr val="2C6E73"/>
+            </a:solidFill>
           </a:ln>
         </p:spPr>
       </p:sp>
@@ -8297,19 +8299,19 @@
           <p:cNvPr id="12" name="">
             <a:extLst xmlns:a="http://schemas.openxmlformats.org/drawingml/2006/main">
               <a:ext uri="{FF2B5EF4-FFF2-40B4-BE49-F238E27FC236}">
-                <a16:creationId xmlns:a16="http://schemas.microsoft.com/office/drawing/2014/main" id="{BA7CD13B-F4F0-4B66-84F8-30CC8775D49E}"/>
-              </a:ext>
-            </a:extLst>
-          </p:cNvPr>
-          <p:cNvSpPr>
-            <a:spLocks xmlns:a="http://schemas.openxmlformats.org/drawingml/2006/main" noGrp="1"/>
-          </p:cNvSpPr>
-          <p:nvPr/>
-        </p:nvSpPr>
-        <p:spPr>
-          <a:xfrm xmlns:a="http://schemas.openxmlformats.org/drawingml/2006/main">
-            <a:off x="1000125" y="2276475"/>
-            <a:ext cx="476250" cy="419100"/>
+                <a16:creationId xmlns:a16="http://schemas.microsoft.com/office/drawing/2014/main" id="{EE40E789-970C-40DE-A5CC-4C8B46043EE4}"/>
+              </a:ext>
+            </a:extLst>
+          </p:cNvPr>
+          <p:cNvSpPr>
+            <a:spLocks xmlns:a="http://schemas.openxmlformats.org/drawingml/2006/main" noGrp="1"/>
+          </p:cNvSpPr>
+          <p:nvPr/>
+        </p:nvSpPr>
+        <p:spPr>
+          <a:xfrm xmlns:a="http://schemas.openxmlformats.org/drawingml/2006/main">
+            <a:off x="1162050" y="2200275"/>
+            <a:ext cx="400050" cy="400050"/>
           </a:xfrm>
           <a:prstGeom xmlns:a="http://schemas.openxmlformats.org/drawingml/2006/main" prst="rect">
             <a:avLst/>
@@ -8326,9 +8328,9 @@
           <a:lstStyle xmlns:a="http://schemas.openxmlformats.org/drawingml/2006/main"/>
           <a:p xmlns:a="http://schemas.openxmlformats.org/drawingml/2006/main">
             <a:pPr algn="ctr">
-              <a:defRPr sz="1350" b="1">
-                <a:solidFill>
-                  <a:srgbClr val="FFFFFF"/>
+              <a:defRPr sz="1125" b="1">
+                <a:solidFill>
+                  <a:srgbClr val="2C6E73"/>
                 </a:solidFill>
                 <a:latin typeface="Arial"/>
                 <a:ea typeface="Arial"/>
@@ -8336,9 +8338,9 @@
               </a:defRPr>
             </a:pPr>
             <a:r>
-              <a:rPr sz="1350" b="1">
-                <a:solidFill>
-                  <a:srgbClr val="FFFFFF"/>
+              <a:rPr sz="1125" b="1">
+                <a:solidFill>
+                  <a:srgbClr val="2C6E73"/>
                 </a:solidFill>
                 <a:latin typeface="Arial"/>
                 <a:ea typeface="Arial"/>
@@ -8354,19 +8356,19 @@
           <p:cNvPr id="13" name="">
             <a:extLst xmlns:a="http://schemas.openxmlformats.org/drawingml/2006/main">
               <a:ext uri="{FF2B5EF4-FFF2-40B4-BE49-F238E27FC236}">
-                <a16:creationId xmlns:a16="http://schemas.microsoft.com/office/drawing/2014/main" id="{4E6F8C57-880B-4809-8ED8-17F0B76780AB}"/>
-              </a:ext>
-            </a:extLst>
-          </p:cNvPr>
-          <p:cNvSpPr>
-            <a:spLocks xmlns:a="http://schemas.openxmlformats.org/drawingml/2006/main" noGrp="1"/>
-          </p:cNvSpPr>
-          <p:nvPr/>
-        </p:nvSpPr>
-        <p:spPr>
-          <a:xfrm xmlns:a="http://schemas.openxmlformats.org/drawingml/2006/main">
-            <a:off x="1714500" y="2181225"/>
-            <a:ext cx="9429750" cy="609600"/>
+                <a16:creationId xmlns:a16="http://schemas.microsoft.com/office/drawing/2014/main" id="{39AB0193-87FA-409B-B284-D0EF496AFD13}"/>
+              </a:ext>
+            </a:extLst>
+          </p:cNvPr>
+          <p:cNvSpPr>
+            <a:spLocks xmlns:a="http://schemas.openxmlformats.org/drawingml/2006/main" noGrp="1"/>
+          </p:cNvSpPr>
+          <p:nvPr/>
+        </p:nvSpPr>
+        <p:spPr>
+          <a:xfrm xmlns:a="http://schemas.openxmlformats.org/drawingml/2006/main">
+            <a:off x="1714500" y="2114550"/>
+            <a:ext cx="9525000" cy="809625"/>
           </a:xfrm>
           <a:prstGeom xmlns:a="http://schemas.openxmlformats.org/drawingml/2006/main" prst="rect">
             <a:avLst/>
@@ -8383,7 +8385,7 @@
           <a:lstStyle xmlns:a="http://schemas.openxmlformats.org/drawingml/2006/main"/>
           <a:p xmlns:a="http://schemas.openxmlformats.org/drawingml/2006/main">
             <a:pPr algn="l">
-              <a:defRPr sz="1500" b="0">
+              <a:defRPr sz="1725" b="0">
                 <a:solidFill>
                   <a:srgbClr val="17253A"/>
                 </a:solidFill>
@@ -8393,7 +8395,7 @@
               </a:defRPr>
             </a:pPr>
             <a:r>
-              <a:rPr sz="1500" b="0">
+              <a:rPr sz="1725" b="0">
                 <a:solidFill>
                   <a:srgbClr val="17253A"/>
                 </a:solidFill>
@@ -8401,7 +8403,7 @@
                 <a:ea typeface="Arial"/>
                 <a:cs typeface="Arial"/>
               </a:rPr>
-              <a:t>Identify the structure: Read or record x before y and note the quadrant.</a:t>
+              <a:t>P: (2, -5) → (-3, 1)</a:t>
             </a:r>
           </a:p>
         </p:txBody>
@@ -8411,28 +8413,30 @@
           <p:cNvPr id="14" name="">
             <a:extLst xmlns:a="http://schemas.openxmlformats.org/drawingml/2006/main">
               <a:ext uri="{FF2B5EF4-FFF2-40B4-BE49-F238E27FC236}">
-                <a16:creationId xmlns:a16="http://schemas.microsoft.com/office/drawing/2014/main" id="{CD9F16CE-FCB2-4E9C-A0C7-1CA749233718}"/>
-              </a:ext>
-            </a:extLst>
-          </p:cNvPr>
-          <p:cNvSpPr>
-            <a:spLocks xmlns:a="http://schemas.openxmlformats.org/drawingml/2006/main" noGrp="1"/>
-          </p:cNvSpPr>
-          <p:nvPr/>
-        </p:nvSpPr>
-        <p:spPr>
-          <a:xfrm xmlns:a="http://schemas.openxmlformats.org/drawingml/2006/main">
-            <a:off x="1000125" y="2990850"/>
-            <a:ext cx="476250" cy="476250"/>
-          </a:xfrm>
-          <a:prstGeom xmlns:a="http://schemas.openxmlformats.org/drawingml/2006/main" prst="ellipse">
+                <a16:creationId xmlns:a16="http://schemas.microsoft.com/office/drawing/2014/main" id="{32451747-B794-4EE3-B08E-44CA97C1FD49}"/>
+              </a:ext>
+            </a:extLst>
+          </p:cNvPr>
+          <p:cNvSpPr>
+            <a:spLocks xmlns:a="http://schemas.openxmlformats.org/drawingml/2006/main" noGrp="1"/>
+          </p:cNvSpPr>
+          <p:nvPr/>
+        </p:nvSpPr>
+        <p:spPr>
+          <a:xfrm xmlns:a="http://schemas.openxmlformats.org/drawingml/2006/main">
+            <a:off x="1714500" y="2943225"/>
+            <a:ext cx="9334500" cy="9525"/>
+          </a:xfrm>
+          <a:prstGeom xmlns:a="http://schemas.openxmlformats.org/drawingml/2006/main" prst="rect">
             <a:avLst/>
           </a:prstGeom>
           <a:solidFill xmlns:a="http://schemas.openxmlformats.org/drawingml/2006/main">
-            <a:srgbClr val="2C6E73"/>
+            <a:srgbClr val="D9E0E6"/>
           </a:solidFill>
           <a:ln xmlns:a="http://schemas.openxmlformats.org/drawingml/2006/main" w="0">
-            <a:noFill/>
+            <a:solidFill>
+              <a:srgbClr val="D9E0E6"/>
+            </a:solidFill>
           </a:ln>
         </p:spPr>
       </p:sp>
@@ -8441,19 +8445,19 @@
           <p:cNvPr id="15" name="">
             <a:extLst xmlns:a="http://schemas.openxmlformats.org/drawingml/2006/main">
               <a:ext uri="{FF2B5EF4-FFF2-40B4-BE49-F238E27FC236}">
-                <a16:creationId xmlns:a16="http://schemas.microsoft.com/office/drawing/2014/main" id="{B906347B-5E6D-45F4-A56A-B35F8EFB3DB9}"/>
-              </a:ext>
-            </a:extLst>
-          </p:cNvPr>
-          <p:cNvSpPr>
-            <a:spLocks xmlns:a="http://schemas.openxmlformats.org/drawingml/2006/main" noGrp="1"/>
-          </p:cNvSpPr>
-          <p:nvPr/>
-        </p:nvSpPr>
-        <p:spPr>
-          <a:xfrm xmlns:a="http://schemas.openxmlformats.org/drawingml/2006/main">
-            <a:off x="1000125" y="3019425"/>
-            <a:ext cx="476250" cy="419100"/>
+                <a16:creationId xmlns:a16="http://schemas.microsoft.com/office/drawing/2014/main" id="{41EA6628-78A2-42BB-8DCD-A2C01EBD8928}"/>
+              </a:ext>
+            </a:extLst>
+          </p:cNvPr>
+          <p:cNvSpPr>
+            <a:spLocks xmlns:a="http://schemas.openxmlformats.org/drawingml/2006/main" noGrp="1"/>
+          </p:cNvSpPr>
+          <p:nvPr/>
+        </p:nvSpPr>
+        <p:spPr>
+          <a:xfrm xmlns:a="http://schemas.openxmlformats.org/drawingml/2006/main">
+            <a:off x="1162050" y="3076575"/>
+            <a:ext cx="400050" cy="400050"/>
           </a:xfrm>
           <a:prstGeom xmlns:a="http://schemas.openxmlformats.org/drawingml/2006/main" prst="rect">
             <a:avLst/>
@@ -8470,9 +8474,9 @@
           <a:lstStyle xmlns:a="http://schemas.openxmlformats.org/drawingml/2006/main"/>
           <a:p xmlns:a="http://schemas.openxmlformats.org/drawingml/2006/main">
             <a:pPr algn="ctr">
-              <a:defRPr sz="1350" b="1">
-                <a:solidFill>
-                  <a:srgbClr val="FFFFFF"/>
+              <a:defRPr sz="1125" b="1">
+                <a:solidFill>
+                  <a:srgbClr val="2C6E73"/>
                 </a:solidFill>
                 <a:latin typeface="Arial"/>
                 <a:ea typeface="Arial"/>
@@ -8480,9 +8484,9 @@
               </a:defRPr>
             </a:pPr>
             <a:r>
-              <a:rPr sz="1350" b="1">
-                <a:solidFill>
-                  <a:srgbClr val="FFFFFF"/>
+              <a:rPr sz="1125" b="1">
+                <a:solidFill>
+                  <a:srgbClr val="2C6E73"/>
                 </a:solidFill>
                 <a:latin typeface="Arial"/>
                 <a:ea typeface="Arial"/>
@@ -8498,19 +8502,19 @@
           <p:cNvPr id="16" name="">
             <a:extLst xmlns:a="http://schemas.openxmlformats.org/drawingml/2006/main">
               <a:ext uri="{FF2B5EF4-FFF2-40B4-BE49-F238E27FC236}">
-                <a16:creationId xmlns:a16="http://schemas.microsoft.com/office/drawing/2014/main" id="{86D63B17-FB93-408F-A989-B04CC8BEEC0A}"/>
-              </a:ext>
-            </a:extLst>
-          </p:cNvPr>
-          <p:cNvSpPr>
-            <a:spLocks xmlns:a="http://schemas.openxmlformats.org/drawingml/2006/main" noGrp="1"/>
-          </p:cNvSpPr>
-          <p:nvPr/>
-        </p:nvSpPr>
-        <p:spPr>
-          <a:xfrm xmlns:a="http://schemas.openxmlformats.org/drawingml/2006/main">
-            <a:off x="1714500" y="2924175"/>
-            <a:ext cx="9429750" cy="609600"/>
+                <a16:creationId xmlns:a16="http://schemas.microsoft.com/office/drawing/2014/main" id="{319FF26D-4A62-4DDC-ADC0-EC45DA672009}"/>
+              </a:ext>
+            </a:extLst>
+          </p:cNvPr>
+          <p:cNvSpPr>
+            <a:spLocks xmlns:a="http://schemas.openxmlformats.org/drawingml/2006/main" noGrp="1"/>
+          </p:cNvSpPr>
+          <p:nvPr/>
+        </p:nvSpPr>
+        <p:spPr>
+          <a:xfrm xmlns:a="http://schemas.openxmlformats.org/drawingml/2006/main">
+            <a:off x="1714500" y="2990850"/>
+            <a:ext cx="9525000" cy="809625"/>
           </a:xfrm>
           <a:prstGeom xmlns:a="http://schemas.openxmlformats.org/drawingml/2006/main" prst="rect">
             <a:avLst/>
@@ -8527,7 +8531,7 @@
           <a:lstStyle xmlns:a="http://schemas.openxmlformats.org/drawingml/2006/main"/>
           <a:p xmlns:a="http://schemas.openxmlformats.org/drawingml/2006/main">
             <a:pPr algn="l">
-              <a:defRPr sz="1500" b="0">
+              <a:defRPr sz="1725" b="0">
                 <a:solidFill>
                   <a:srgbClr val="17253A"/>
                 </a:solidFill>
@@ -8537,7 +8541,7 @@
               </a:defRPr>
             </a:pPr>
             <a:r>
-              <a:rPr sz="1500" b="0">
+              <a:rPr sz="1725" b="0">
                 <a:solidFill>
                   <a:srgbClr val="17253A"/>
                 </a:solidFill>
@@ -8545,7 +8549,7 @@
                 <a:ea typeface="Arial"/>
                 <a:cs typeface="Arial"/>
               </a:rPr>
-              <a:t>Set up the method: Apply the same vector or mirror line to every vertex.</a:t>
+              <a:t>x change: -3 - 2 = -5 → 5 left</a:t>
             </a:r>
           </a:p>
         </p:txBody>
@@ -8555,28 +8559,30 @@
           <p:cNvPr id="17" name="">
             <a:extLst xmlns:a="http://schemas.openxmlformats.org/drawingml/2006/main">
               <a:ext uri="{FF2B5EF4-FFF2-40B4-BE49-F238E27FC236}">
-                <a16:creationId xmlns:a16="http://schemas.microsoft.com/office/drawing/2014/main" id="{B7000F2B-762C-4DAD-92D3-6BF0203E9AF0}"/>
-              </a:ext>
-            </a:extLst>
-          </p:cNvPr>
-          <p:cNvSpPr>
-            <a:spLocks xmlns:a="http://schemas.openxmlformats.org/drawingml/2006/main" noGrp="1"/>
-          </p:cNvSpPr>
-          <p:nvPr/>
-        </p:nvSpPr>
-        <p:spPr>
-          <a:xfrm xmlns:a="http://schemas.openxmlformats.org/drawingml/2006/main">
-            <a:off x="1000125" y="3733800"/>
-            <a:ext cx="476250" cy="476250"/>
-          </a:xfrm>
-          <a:prstGeom xmlns:a="http://schemas.openxmlformats.org/drawingml/2006/main" prst="ellipse">
+                <a16:creationId xmlns:a16="http://schemas.microsoft.com/office/drawing/2014/main" id="{58096765-055B-4210-A8ED-E9E577C374CA}"/>
+              </a:ext>
+            </a:extLst>
+          </p:cNvPr>
+          <p:cNvSpPr>
+            <a:spLocks xmlns:a="http://schemas.openxmlformats.org/drawingml/2006/main" noGrp="1"/>
+          </p:cNvSpPr>
+          <p:nvPr/>
+        </p:nvSpPr>
+        <p:spPr>
+          <a:xfrm xmlns:a="http://schemas.openxmlformats.org/drawingml/2006/main">
+            <a:off x="1714500" y="3819525"/>
+            <a:ext cx="9334500" cy="9525"/>
+          </a:xfrm>
+          <a:prstGeom xmlns:a="http://schemas.openxmlformats.org/drawingml/2006/main" prst="rect">
             <a:avLst/>
           </a:prstGeom>
           <a:solidFill xmlns:a="http://schemas.openxmlformats.org/drawingml/2006/main">
-            <a:srgbClr val="2C6E73"/>
+            <a:srgbClr val="D9E0E6"/>
           </a:solidFill>
           <a:ln xmlns:a="http://schemas.openxmlformats.org/drawingml/2006/main" w="0">
-            <a:noFill/>
+            <a:solidFill>
+              <a:srgbClr val="D9E0E6"/>
+            </a:solidFill>
           </a:ln>
         </p:spPr>
       </p:sp>
@@ -8585,19 +8591,19 @@
           <p:cNvPr id="18" name="">
             <a:extLst xmlns:a="http://schemas.openxmlformats.org/drawingml/2006/main">
               <a:ext uri="{FF2B5EF4-FFF2-40B4-BE49-F238E27FC236}">
-                <a16:creationId xmlns:a16="http://schemas.microsoft.com/office/drawing/2014/main" id="{6AAAAC24-DCF2-4E95-AAB4-DA7C743F53C4}"/>
-              </a:ext>
-            </a:extLst>
-          </p:cNvPr>
-          <p:cNvSpPr>
-            <a:spLocks xmlns:a="http://schemas.openxmlformats.org/drawingml/2006/main" noGrp="1"/>
-          </p:cNvSpPr>
-          <p:nvPr/>
-        </p:nvSpPr>
-        <p:spPr>
-          <a:xfrm xmlns:a="http://schemas.openxmlformats.org/drawingml/2006/main">
-            <a:off x="1000125" y="3762375"/>
-            <a:ext cx="476250" cy="419100"/>
+                <a16:creationId xmlns:a16="http://schemas.microsoft.com/office/drawing/2014/main" id="{72C4F949-BC98-4EC1-B4F1-369A9CD5BC0A}"/>
+              </a:ext>
+            </a:extLst>
+          </p:cNvPr>
+          <p:cNvSpPr>
+            <a:spLocks xmlns:a="http://schemas.openxmlformats.org/drawingml/2006/main" noGrp="1"/>
+          </p:cNvSpPr>
+          <p:nvPr/>
+        </p:nvSpPr>
+        <p:spPr>
+          <a:xfrm xmlns:a="http://schemas.openxmlformats.org/drawingml/2006/main">
+            <a:off x="1162050" y="3952875"/>
+            <a:ext cx="400050" cy="400050"/>
           </a:xfrm>
           <a:prstGeom xmlns:a="http://schemas.openxmlformats.org/drawingml/2006/main" prst="rect">
             <a:avLst/>
@@ -8614,9 +8620,9 @@
           <a:lstStyle xmlns:a="http://schemas.openxmlformats.org/drawingml/2006/main"/>
           <a:p xmlns:a="http://schemas.openxmlformats.org/drawingml/2006/main">
             <a:pPr algn="ctr">
-              <a:defRPr sz="1350" b="1">
-                <a:solidFill>
-                  <a:srgbClr val="FFFFFF"/>
+              <a:defRPr sz="1125" b="1">
+                <a:solidFill>
+                  <a:srgbClr val="2C6E73"/>
                 </a:solidFill>
                 <a:latin typeface="Arial"/>
                 <a:ea typeface="Arial"/>
@@ -8624,9 +8630,9 @@
               </a:defRPr>
             </a:pPr>
             <a:r>
-              <a:rPr sz="1350" b="1">
-                <a:solidFill>
-                  <a:srgbClr val="FFFFFF"/>
+              <a:rPr sz="1125" b="1">
+                <a:solidFill>
+                  <a:srgbClr val="2C6E73"/>
                 </a:solidFill>
                 <a:latin typeface="Arial"/>
                 <a:ea typeface="Arial"/>
@@ -8642,19 +8648,19 @@
           <p:cNvPr id="19" name="">
             <a:extLst xmlns:a="http://schemas.openxmlformats.org/drawingml/2006/main">
               <a:ext uri="{FF2B5EF4-FFF2-40B4-BE49-F238E27FC236}">
-                <a16:creationId xmlns:a16="http://schemas.microsoft.com/office/drawing/2014/main" id="{E5A7D10C-2E40-49E0-9561-72A8EA922549}"/>
-              </a:ext>
-            </a:extLst>
-          </p:cNvPr>
-          <p:cNvSpPr>
-            <a:spLocks xmlns:a="http://schemas.openxmlformats.org/drawingml/2006/main" noGrp="1"/>
-          </p:cNvSpPr>
-          <p:nvPr/>
-        </p:nvSpPr>
-        <p:spPr>
-          <a:xfrm xmlns:a="http://schemas.openxmlformats.org/drawingml/2006/main">
-            <a:off x="1714500" y="3667125"/>
-            <a:ext cx="9429750" cy="609600"/>
+                <a16:creationId xmlns:a16="http://schemas.microsoft.com/office/drawing/2014/main" id="{4D984EF6-20B9-401E-9C04-9534B1F851D2}"/>
+              </a:ext>
+            </a:extLst>
+          </p:cNvPr>
+          <p:cNvSpPr>
+            <a:spLocks xmlns:a="http://schemas.openxmlformats.org/drawingml/2006/main" noGrp="1"/>
+          </p:cNvSpPr>
+          <p:nvPr/>
+        </p:nvSpPr>
+        <p:spPr>
+          <a:xfrm xmlns:a="http://schemas.openxmlformats.org/drawingml/2006/main">
+            <a:off x="1714500" y="3867150"/>
+            <a:ext cx="9525000" cy="809625"/>
           </a:xfrm>
           <a:prstGeom xmlns:a="http://schemas.openxmlformats.org/drawingml/2006/main" prst="rect">
             <a:avLst/>
@@ -8671,7 +8677,7 @@
           <a:lstStyle xmlns:a="http://schemas.openxmlformats.org/drawingml/2006/main"/>
           <a:p xmlns:a="http://schemas.openxmlformats.org/drawingml/2006/main">
             <a:pPr algn="l">
-              <a:defRPr sz="1500" b="0">
+              <a:defRPr sz="1725" b="0">
                 <a:solidFill>
                   <a:srgbClr val="17253A"/>
                 </a:solidFill>
@@ -8681,7 +8687,7 @@
               </a:defRPr>
             </a:pPr>
             <a:r>
-              <a:rPr sz="1500" b="0">
+              <a:rPr sz="1725" b="0">
                 <a:solidFill>
                   <a:srgbClr val="17253A"/>
                 </a:solidFill>
@@ -8689,7 +8695,7 @@
                 <a:ea typeface="Arial"/>
                 <a:cs typeface="Arial"/>
               </a:rPr>
-              <a:t>Complete the calculation: 5 left and 6 up.</a:t>
+              <a:t>y change: 1 - (-5) = 6 → 6 up</a:t>
             </a:r>
           </a:p>
         </p:txBody>
@@ -8699,28 +8705,30 @@
           <p:cNvPr id="20" name="">
             <a:extLst xmlns:a="http://schemas.openxmlformats.org/drawingml/2006/main">
               <a:ext uri="{FF2B5EF4-FFF2-40B4-BE49-F238E27FC236}">
-                <a16:creationId xmlns:a16="http://schemas.microsoft.com/office/drawing/2014/main" id="{9A2E7C39-73D8-4C57-8224-80027EACA54A}"/>
-              </a:ext>
-            </a:extLst>
-          </p:cNvPr>
-          <p:cNvSpPr>
-            <a:spLocks xmlns:a="http://schemas.openxmlformats.org/drawingml/2006/main" noGrp="1"/>
-          </p:cNvSpPr>
-          <p:nvPr/>
-        </p:nvSpPr>
-        <p:spPr>
-          <a:xfrm xmlns:a="http://schemas.openxmlformats.org/drawingml/2006/main">
-            <a:off x="1000125" y="4476750"/>
-            <a:ext cx="476250" cy="476250"/>
-          </a:xfrm>
-          <a:prstGeom xmlns:a="http://schemas.openxmlformats.org/drawingml/2006/main" prst="ellipse">
+                <a16:creationId xmlns:a16="http://schemas.microsoft.com/office/drawing/2014/main" id="{392FCEE8-F3EB-4154-98A8-DFC85F204045}"/>
+              </a:ext>
+            </a:extLst>
+          </p:cNvPr>
+          <p:cNvSpPr>
+            <a:spLocks xmlns:a="http://schemas.openxmlformats.org/drawingml/2006/main" noGrp="1"/>
+          </p:cNvSpPr>
+          <p:nvPr/>
+        </p:nvSpPr>
+        <p:spPr>
+          <a:xfrm xmlns:a="http://schemas.openxmlformats.org/drawingml/2006/main">
+            <a:off x="1714500" y="4695825"/>
+            <a:ext cx="9334500" cy="9525"/>
+          </a:xfrm>
+          <a:prstGeom xmlns:a="http://schemas.openxmlformats.org/drawingml/2006/main" prst="rect">
             <a:avLst/>
           </a:prstGeom>
           <a:solidFill xmlns:a="http://schemas.openxmlformats.org/drawingml/2006/main">
-            <a:srgbClr val="2C6E73"/>
+            <a:srgbClr val="D9E0E6"/>
           </a:solidFill>
           <a:ln xmlns:a="http://schemas.openxmlformats.org/drawingml/2006/main" w="0">
-            <a:noFill/>
+            <a:solidFill>
+              <a:srgbClr val="D9E0E6"/>
+            </a:solidFill>
           </a:ln>
         </p:spPr>
       </p:sp>
@@ -8729,19 +8737,19 @@
           <p:cNvPr id="21" name="">
             <a:extLst xmlns:a="http://schemas.openxmlformats.org/drawingml/2006/main">
               <a:ext uri="{FF2B5EF4-FFF2-40B4-BE49-F238E27FC236}">
-                <a16:creationId xmlns:a16="http://schemas.microsoft.com/office/drawing/2014/main" id="{A2359D8C-56FD-40CF-8F3F-4305C5CAE111}"/>
-              </a:ext>
-            </a:extLst>
-          </p:cNvPr>
-          <p:cNvSpPr>
-            <a:spLocks xmlns:a="http://schemas.openxmlformats.org/drawingml/2006/main" noGrp="1"/>
-          </p:cNvSpPr>
-          <p:nvPr/>
-        </p:nvSpPr>
-        <p:spPr>
-          <a:xfrm xmlns:a="http://schemas.openxmlformats.org/drawingml/2006/main">
-            <a:off x="1000125" y="4505325"/>
-            <a:ext cx="476250" cy="419100"/>
+                <a16:creationId xmlns:a16="http://schemas.microsoft.com/office/drawing/2014/main" id="{56896006-BF78-4DD9-B2BE-74ADCBC8A59A}"/>
+              </a:ext>
+            </a:extLst>
+          </p:cNvPr>
+          <p:cNvSpPr>
+            <a:spLocks xmlns:a="http://schemas.openxmlformats.org/drawingml/2006/main" noGrp="1"/>
+          </p:cNvSpPr>
+          <p:nvPr/>
+        </p:nvSpPr>
+        <p:spPr>
+          <a:xfrm xmlns:a="http://schemas.openxmlformats.org/drawingml/2006/main">
+            <a:off x="1162050" y="4829175"/>
+            <a:ext cx="400050" cy="400050"/>
           </a:xfrm>
           <a:prstGeom xmlns:a="http://schemas.openxmlformats.org/drawingml/2006/main" prst="rect">
             <a:avLst/>
@@ -8758,9 +8766,9 @@
           <a:lstStyle xmlns:a="http://schemas.openxmlformats.org/drawingml/2006/main"/>
           <a:p xmlns:a="http://schemas.openxmlformats.org/drawingml/2006/main">
             <a:pPr algn="ctr">
-              <a:defRPr sz="1350" b="1">
-                <a:solidFill>
-                  <a:srgbClr val="FFFFFF"/>
+              <a:defRPr sz="1125" b="1">
+                <a:solidFill>
+                  <a:srgbClr val="2F785D"/>
                 </a:solidFill>
                 <a:latin typeface="Arial"/>
                 <a:ea typeface="Arial"/>
@@ -8768,9 +8776,9 @@
               </a:defRPr>
             </a:pPr>
             <a:r>
-              <a:rPr sz="1350" b="1">
-                <a:solidFill>
-                  <a:srgbClr val="FFFFFF"/>
+              <a:rPr sz="1125" b="1">
+                <a:solidFill>
+                  <a:srgbClr val="2F785D"/>
                 </a:solidFill>
                 <a:latin typeface="Arial"/>
                 <a:ea typeface="Arial"/>
@@ -8786,19 +8794,19 @@
           <p:cNvPr id="22" name="">
             <a:extLst xmlns:a="http://schemas.openxmlformats.org/drawingml/2006/main">
               <a:ext uri="{FF2B5EF4-FFF2-40B4-BE49-F238E27FC236}">
-                <a16:creationId xmlns:a16="http://schemas.microsoft.com/office/drawing/2014/main" id="{9BEC18DE-AD53-4C5A-B7F8-3547E42ADC7B}"/>
-              </a:ext>
-            </a:extLst>
-          </p:cNvPr>
-          <p:cNvSpPr>
-            <a:spLocks xmlns:a="http://schemas.openxmlformats.org/drawingml/2006/main" noGrp="1"/>
-          </p:cNvSpPr>
-          <p:nvPr/>
-        </p:nvSpPr>
-        <p:spPr>
-          <a:xfrm xmlns:a="http://schemas.openxmlformats.org/drawingml/2006/main">
-            <a:off x="1714500" y="4410075"/>
-            <a:ext cx="9429750" cy="609600"/>
+                <a16:creationId xmlns:a16="http://schemas.microsoft.com/office/drawing/2014/main" id="{0A9A022B-EF29-451D-9BE2-844686513F7E}"/>
+              </a:ext>
+            </a:extLst>
+          </p:cNvPr>
+          <p:cNvSpPr>
+            <a:spLocks xmlns:a="http://schemas.openxmlformats.org/drawingml/2006/main" noGrp="1"/>
+          </p:cNvSpPr>
+          <p:nvPr/>
+        </p:nvSpPr>
+        <p:spPr>
+          <a:xfrm xmlns:a="http://schemas.openxmlformats.org/drawingml/2006/main">
+            <a:off x="1714500" y="4743450"/>
+            <a:ext cx="9525000" cy="809625"/>
           </a:xfrm>
           <a:prstGeom xmlns:a="http://schemas.openxmlformats.org/drawingml/2006/main" prst="rect">
             <a:avLst/>
@@ -8815,7 +8823,7 @@
           <a:lstStyle xmlns:a="http://schemas.openxmlformats.org/drawingml/2006/main"/>
           <a:p xmlns:a="http://schemas.openxmlformats.org/drawingml/2006/main">
             <a:pPr algn="l">
-              <a:defRPr sz="1500" b="1">
+              <a:defRPr sz="1725" b="1">
                 <a:solidFill>
                   <a:srgbClr val="2F785D"/>
                 </a:solidFill>
@@ -8825,7 +8833,7 @@
               </a:defRPr>
             </a:pPr>
             <a:r>
-              <a:rPr sz="1500" b="1">
+              <a:rPr sz="1725" b="1">
                 <a:solidFill>
                   <a:srgbClr val="2F785D"/>
                 </a:solidFill>
@@ -8833,7 +8841,7 @@
                 <a:ea typeface="Arial"/>
                 <a:cs typeface="Arial"/>
               </a:rPr>
-              <a:t>Check the result: Check side lengths and orientation after the transformation.</a:t>
+              <a:t>Translation: 5 left and 6 up</a:t>
             </a:r>
           </a:p>
         </p:txBody>
@@ -8841,7 +8849,7 @@
     </p:spTree>
     <p:extLst>
       <p:ext uri="{BB962C8B-B14F-4D97-AF65-F5344CB8AC3E}">
-        <p14:creationId xmlns:p14="http://schemas.microsoft.com/office/powerpoint/2010/main" val="1064743230"/>
+        <p14:creationId xmlns:p14="http://schemas.microsoft.com/office/powerpoint/2010/main" val="1294623078"/>
       </p:ext>
     </p:extLst>
   </p:cSld>
@@ -9134,7 +9142,7 @@
           <p:cNvPr id="15" name="">
             <a:extLst xmlns:a="http://schemas.openxmlformats.org/drawingml/2006/main">
               <a:ext uri="{FF2B5EF4-FFF2-40B4-BE49-F238E27FC236}">
-                <a16:creationId xmlns:a16="http://schemas.microsoft.com/office/drawing/2014/main" id="{7D700037-AECE-4B24-9056-06EAE3BA53C7}"/>
+                <a16:creationId xmlns:a16="http://schemas.microsoft.com/office/drawing/2014/main" id="{0772DB1D-0ACE-4E2F-B7F6-41652A5CC83C}"/>
               </a:ext>
             </a:extLst>
           </p:cNvPr>
@@ -9166,7 +9174,7 @@
           <p:cNvPr id="2" name="">
             <a:extLst xmlns:a="http://schemas.openxmlformats.org/drawingml/2006/main">
               <a:ext uri="{FF2B5EF4-FFF2-40B4-BE49-F238E27FC236}">
-                <a16:creationId xmlns:a16="http://schemas.microsoft.com/office/drawing/2014/main" id="{832E661D-9A4A-4C5F-9D56-0C68FED0B18B}"/>
+                <a16:creationId xmlns:a16="http://schemas.microsoft.com/office/drawing/2014/main" id="{4A171D93-61D2-4910-8379-66EB7E1D3956}"/>
               </a:ext>
             </a:extLst>
           </p:cNvPr>
@@ -9223,7 +9231,7 @@
           <p:cNvPr id="3" name="">
             <a:extLst xmlns:a="http://schemas.openxmlformats.org/drawingml/2006/main">
               <a:ext uri="{FF2B5EF4-FFF2-40B4-BE49-F238E27FC236}">
-                <a16:creationId xmlns:a16="http://schemas.microsoft.com/office/drawing/2014/main" id="{232159EA-11A2-4D77-AD96-FE28356E64B3}"/>
+                <a16:creationId xmlns:a16="http://schemas.microsoft.com/office/drawing/2014/main" id="{D87BF33A-66C9-420A-9943-4AC223293B1C}"/>
               </a:ext>
             </a:extLst>
           </p:cNvPr>
@@ -9255,7 +9263,7 @@
           <p:cNvPr id="4" name="">
             <a:extLst xmlns:a="http://schemas.openxmlformats.org/drawingml/2006/main">
               <a:ext uri="{FF2B5EF4-FFF2-40B4-BE49-F238E27FC236}">
-                <a16:creationId xmlns:a16="http://schemas.microsoft.com/office/drawing/2014/main" id="{2BF35A35-9BED-4ED9-97C4-7324B04639AA}"/>
+                <a16:creationId xmlns:a16="http://schemas.microsoft.com/office/drawing/2014/main" id="{ED17725B-BF93-4F92-B2D6-F9FAA6CB9188}"/>
               </a:ext>
             </a:extLst>
           </p:cNvPr>
@@ -9312,7 +9320,7 @@
           <p:cNvPr id="5" name="">
             <a:extLst xmlns:a="http://schemas.openxmlformats.org/drawingml/2006/main">
               <a:ext uri="{FF2B5EF4-FFF2-40B4-BE49-F238E27FC236}">
-                <a16:creationId xmlns:a16="http://schemas.microsoft.com/office/drawing/2014/main" id="{426CD09F-21BD-4549-97CE-9ED4E298D8FD}"/>
+                <a16:creationId xmlns:a16="http://schemas.microsoft.com/office/drawing/2014/main" id="{06600C0D-9A28-4E81-96F6-0A3A33DFF6B8}"/>
               </a:ext>
             </a:extLst>
           </p:cNvPr>
@@ -9369,7 +9377,7 @@
           <p:cNvPr id="6" name="">
             <a:extLst xmlns:a="http://schemas.openxmlformats.org/drawingml/2006/main">
               <a:ext uri="{FF2B5EF4-FFF2-40B4-BE49-F238E27FC236}">
-                <a16:creationId xmlns:a16="http://schemas.microsoft.com/office/drawing/2014/main" id="{4C36CF6E-C9C1-4419-8CDC-30F70D14620F}"/>
+                <a16:creationId xmlns:a16="http://schemas.microsoft.com/office/drawing/2014/main" id="{C2CF5FF6-FF68-49B9-8812-A57B5929EA82}"/>
               </a:ext>
             </a:extLst>
           </p:cNvPr>
@@ -9426,7 +9434,7 @@
           <p:cNvPr id="7" name="">
             <a:extLst xmlns:a="http://schemas.openxmlformats.org/drawingml/2006/main">
               <a:ext uri="{FF2B5EF4-FFF2-40B4-BE49-F238E27FC236}">
-                <a16:creationId xmlns:a16="http://schemas.microsoft.com/office/drawing/2014/main" id="{638229B6-199D-4F29-85BD-746B4D280519}"/>
+                <a16:creationId xmlns:a16="http://schemas.microsoft.com/office/drawing/2014/main" id="{4ACD94DD-B3A9-491C-9EEC-12C38D6014C3}"/>
               </a:ext>
             </a:extLst>
           </p:cNvPr>
@@ -9458,7 +9466,7 @@
           <p:cNvPr id="8" name="">
             <a:extLst xmlns:a="http://schemas.openxmlformats.org/drawingml/2006/main">
               <a:ext uri="{FF2B5EF4-FFF2-40B4-BE49-F238E27FC236}">
-                <a16:creationId xmlns:a16="http://schemas.microsoft.com/office/drawing/2014/main" id="{20D9878E-2152-46D1-A703-F62314BDB81E}"/>
+                <a16:creationId xmlns:a16="http://schemas.microsoft.com/office/drawing/2014/main" id="{728E659D-0387-49D6-91E8-671908E43E84}"/>
               </a:ext>
             </a:extLst>
           </p:cNvPr>
@@ -9515,7 +9523,7 @@
           <p:cNvPr id="9" name="">
             <a:extLst xmlns:a="http://schemas.openxmlformats.org/drawingml/2006/main">
               <a:ext uri="{FF2B5EF4-FFF2-40B4-BE49-F238E27FC236}">
-                <a16:creationId xmlns:a16="http://schemas.microsoft.com/office/drawing/2014/main" id="{9C12E580-DB11-4097-89E4-A7C4DC9DB24A}"/>
+                <a16:creationId xmlns:a16="http://schemas.microsoft.com/office/drawing/2014/main" id="{12031E6E-C652-4153-AD61-5D10E2F15AEF}"/>
               </a:ext>
             </a:extLst>
           </p:cNvPr>
@@ -9572,7 +9580,7 @@
           <p:cNvPr id="10" name="">
             <a:extLst xmlns:a="http://schemas.openxmlformats.org/drawingml/2006/main">
               <a:ext uri="{FF2B5EF4-FFF2-40B4-BE49-F238E27FC236}">
-                <a16:creationId xmlns:a16="http://schemas.microsoft.com/office/drawing/2014/main" id="{D3AAD1B3-9681-42E7-B647-D2D017CEF278}"/>
+                <a16:creationId xmlns:a16="http://schemas.microsoft.com/office/drawing/2014/main" id="{FFA5EFCB-D6F5-428D-A3CD-C64D69481C8B}"/>
               </a:ext>
             </a:extLst>
           </p:cNvPr>
@@ -9629,7 +9637,7 @@
           <p:cNvPr id="11" name="">
             <a:extLst xmlns:a="http://schemas.openxmlformats.org/drawingml/2006/main">
               <a:ext uri="{FF2B5EF4-FFF2-40B4-BE49-F238E27FC236}">
-                <a16:creationId xmlns:a16="http://schemas.microsoft.com/office/drawing/2014/main" id="{978AB339-F945-4546-867C-FD5A69615E8F}"/>
+                <a16:creationId xmlns:a16="http://schemas.microsoft.com/office/drawing/2014/main" id="{BDA9A820-8DF2-4043-A945-5369514342CB}"/>
               </a:ext>
             </a:extLst>
           </p:cNvPr>
@@ -9686,7 +9694,7 @@
           <p:cNvPr id="12" name="">
             <a:extLst xmlns:a="http://schemas.openxmlformats.org/drawingml/2006/main">
               <a:ext uri="{FF2B5EF4-FFF2-40B4-BE49-F238E27FC236}">
-                <a16:creationId xmlns:a16="http://schemas.microsoft.com/office/drawing/2014/main" id="{B5231715-7FCF-4097-8DF4-B36522C21DAC}"/>
+                <a16:creationId xmlns:a16="http://schemas.microsoft.com/office/drawing/2014/main" id="{155B0067-2FC2-431F-A728-B0CE011B9D81}"/>
               </a:ext>
             </a:extLst>
           </p:cNvPr>
@@ -9718,7 +9726,7 @@
           <p:cNvPr id="13" name="">
             <a:extLst xmlns:a="http://schemas.openxmlformats.org/drawingml/2006/main">
               <a:ext uri="{FF2B5EF4-FFF2-40B4-BE49-F238E27FC236}">
-                <a16:creationId xmlns:a16="http://schemas.microsoft.com/office/drawing/2014/main" id="{1558FBB6-C5AB-4F4D-A15D-12D252EE0355}"/>
+                <a16:creationId xmlns:a16="http://schemas.microsoft.com/office/drawing/2014/main" id="{C74B9E69-AC79-4D02-8D57-D475A9B0C18E}"/>
               </a:ext>
             </a:extLst>
           </p:cNvPr>
@@ -9775,7 +9783,7 @@
           <p:cNvPr id="14" name="">
             <a:extLst xmlns:a="http://schemas.openxmlformats.org/drawingml/2006/main">
               <a:ext uri="{FF2B5EF4-FFF2-40B4-BE49-F238E27FC236}">
-                <a16:creationId xmlns:a16="http://schemas.microsoft.com/office/drawing/2014/main" id="{7C046D33-70E8-41AF-B6DF-7EF1F91BAAD5}"/>
+                <a16:creationId xmlns:a16="http://schemas.microsoft.com/office/drawing/2014/main" id="{BE6B57D0-4D93-47BE-97F9-0A5DBF80F851}"/>
               </a:ext>
             </a:extLst>
           </p:cNvPr>
@@ -9830,7 +9838,7 @@
     </p:spTree>
     <p:extLst>
       <p:ext uri="{BB962C8B-B14F-4D97-AF65-F5344CB8AC3E}">
-        <p14:creationId xmlns:p14="http://schemas.microsoft.com/office/powerpoint/2010/main" val="801976441"/>
+        <p14:creationId xmlns:p14="http://schemas.microsoft.com/office/powerpoint/2010/main" val="1063351896"/>
       </p:ext>
     </p:extLst>
   </p:cSld>
@@ -10031,7 +10039,7 @@
           <p:cNvPr id="16" name="">
             <a:extLst xmlns:a="http://schemas.openxmlformats.org/drawingml/2006/main">
               <a:ext uri="{FF2B5EF4-FFF2-40B4-BE49-F238E27FC236}">
-                <a16:creationId xmlns:a16="http://schemas.microsoft.com/office/drawing/2014/main" id="{4CC618E6-B6DD-4082-A910-33E6C4CBBF0D}"/>
+                <a16:creationId xmlns:a16="http://schemas.microsoft.com/office/drawing/2014/main" id="{6E4EA183-2675-4F99-92DE-E19B0D981C84}"/>
               </a:ext>
             </a:extLst>
           </p:cNvPr>
@@ -10063,7 +10071,7 @@
           <p:cNvPr id="2" name="">
             <a:extLst xmlns:a="http://schemas.openxmlformats.org/drawingml/2006/main">
               <a:ext uri="{FF2B5EF4-FFF2-40B4-BE49-F238E27FC236}">
-                <a16:creationId xmlns:a16="http://schemas.microsoft.com/office/drawing/2014/main" id="{4E525830-834A-49C8-BCC8-8AB55A70D481}"/>
+                <a16:creationId xmlns:a16="http://schemas.microsoft.com/office/drawing/2014/main" id="{3A01A777-05B0-4F6A-BFBE-5C6B63FE17A0}"/>
               </a:ext>
             </a:extLst>
           </p:cNvPr>
@@ -10120,7 +10128,7 @@
           <p:cNvPr id="3" name="">
             <a:extLst xmlns:a="http://schemas.openxmlformats.org/drawingml/2006/main">
               <a:ext uri="{FF2B5EF4-FFF2-40B4-BE49-F238E27FC236}">
-                <a16:creationId xmlns:a16="http://schemas.microsoft.com/office/drawing/2014/main" id="{ADF8C1FA-D4BD-4D12-9D35-38A561E56B31}"/>
+                <a16:creationId xmlns:a16="http://schemas.microsoft.com/office/drawing/2014/main" id="{2F56076C-FD6E-4D88-A5CC-4E7F78220EB0}"/>
               </a:ext>
             </a:extLst>
           </p:cNvPr>
@@ -10152,7 +10160,7 @@
           <p:cNvPr id="4" name="">
             <a:extLst xmlns:a="http://schemas.openxmlformats.org/drawingml/2006/main">
               <a:ext uri="{FF2B5EF4-FFF2-40B4-BE49-F238E27FC236}">
-                <a16:creationId xmlns:a16="http://schemas.microsoft.com/office/drawing/2014/main" id="{65FA803A-3A21-4D76-A55D-9212196D8806}"/>
+                <a16:creationId xmlns:a16="http://schemas.microsoft.com/office/drawing/2014/main" id="{A937DC0F-76A3-481D-9075-41E6006FE4C2}"/>
               </a:ext>
             </a:extLst>
           </p:cNvPr>
@@ -10209,7 +10217,7 @@
           <p:cNvPr id="5" name="">
             <a:extLst xmlns:a="http://schemas.openxmlformats.org/drawingml/2006/main">
               <a:ext uri="{FF2B5EF4-FFF2-40B4-BE49-F238E27FC236}">
-                <a16:creationId xmlns:a16="http://schemas.microsoft.com/office/drawing/2014/main" id="{AB4F43C5-03A4-4D14-98AC-86AADBE7ACE6}"/>
+                <a16:creationId xmlns:a16="http://schemas.microsoft.com/office/drawing/2014/main" id="{1BA8B23B-3A08-41A2-AA16-B315DD5A1C1E}"/>
               </a:ext>
             </a:extLst>
           </p:cNvPr>
@@ -10266,7 +10274,7 @@
           <p:cNvPr id="6" name="">
             <a:extLst xmlns:a="http://schemas.openxmlformats.org/drawingml/2006/main">
               <a:ext uri="{FF2B5EF4-FFF2-40B4-BE49-F238E27FC236}">
-                <a16:creationId xmlns:a16="http://schemas.microsoft.com/office/drawing/2014/main" id="{21238727-CEAB-4FAB-93A9-601B3B9FB943}"/>
+                <a16:creationId xmlns:a16="http://schemas.microsoft.com/office/drawing/2014/main" id="{550EE96B-F51E-49B0-AADC-2DFA5247CC34}"/>
               </a:ext>
             </a:extLst>
           </p:cNvPr>
@@ -10323,7 +10331,7 @@
           <p:cNvPr id="7" name="">
             <a:extLst xmlns:a="http://schemas.openxmlformats.org/drawingml/2006/main">
               <a:ext uri="{FF2B5EF4-FFF2-40B4-BE49-F238E27FC236}">
-                <a16:creationId xmlns:a16="http://schemas.microsoft.com/office/drawing/2014/main" id="{155EC7C9-C47F-4B55-8DD6-8C3E87C4F54C}"/>
+                <a16:creationId xmlns:a16="http://schemas.microsoft.com/office/drawing/2014/main" id="{7C853901-A238-4EAF-BA8C-9A8FD1EC7AF5}"/>
               </a:ext>
             </a:extLst>
           </p:cNvPr>
@@ -10355,7 +10363,7 @@
           <p:cNvPr id="8" name="">
             <a:extLst xmlns:a="http://schemas.openxmlformats.org/drawingml/2006/main">
               <a:ext uri="{FF2B5EF4-FFF2-40B4-BE49-F238E27FC236}">
-                <a16:creationId xmlns:a16="http://schemas.microsoft.com/office/drawing/2014/main" id="{1FB79918-CC78-4902-83B9-F09104EAAB49}"/>
+                <a16:creationId xmlns:a16="http://schemas.microsoft.com/office/drawing/2014/main" id="{6CC6EC44-E26C-4783-AAE7-3C4A5BDFF85F}"/>
               </a:ext>
             </a:extLst>
           </p:cNvPr>
@@ -10412,7 +10420,7 @@
           <p:cNvPr id="9" name="">
             <a:extLst xmlns:a="http://schemas.openxmlformats.org/drawingml/2006/main">
               <a:ext uri="{FF2B5EF4-FFF2-40B4-BE49-F238E27FC236}">
-                <a16:creationId xmlns:a16="http://schemas.microsoft.com/office/drawing/2014/main" id="{BAB56C99-F7F8-4CEE-9260-AEC2C8CAF08F}"/>
+                <a16:creationId xmlns:a16="http://schemas.microsoft.com/office/drawing/2014/main" id="{3DC83EDF-7AC5-4D69-B6B6-B7F07689803A}"/>
               </a:ext>
             </a:extLst>
           </p:cNvPr>
@@ -10469,7 +10477,7 @@
           <p:cNvPr id="10" name="">
             <a:extLst xmlns:a="http://schemas.openxmlformats.org/drawingml/2006/main">
               <a:ext uri="{FF2B5EF4-FFF2-40B4-BE49-F238E27FC236}">
-                <a16:creationId xmlns:a16="http://schemas.microsoft.com/office/drawing/2014/main" id="{9A2B5057-C916-456E-90EF-76F63B50624B}"/>
+                <a16:creationId xmlns:a16="http://schemas.microsoft.com/office/drawing/2014/main" id="{F0910248-6A55-4757-98A8-D1B8669F5E78}"/>
               </a:ext>
             </a:extLst>
           </p:cNvPr>
@@ -10526,7 +10534,7 @@
           <p:cNvPr id="11" name="">
             <a:extLst xmlns:a="http://schemas.openxmlformats.org/drawingml/2006/main">
               <a:ext uri="{FF2B5EF4-FFF2-40B4-BE49-F238E27FC236}">
-                <a16:creationId xmlns:a16="http://schemas.microsoft.com/office/drawing/2014/main" id="{2A2073A9-AF47-45A1-A2BA-8F9DE6A2AAEB}"/>
+                <a16:creationId xmlns:a16="http://schemas.microsoft.com/office/drawing/2014/main" id="{7ABA338A-3432-47E3-A12C-1C1DBFA88C4B}"/>
               </a:ext>
             </a:extLst>
           </p:cNvPr>
@@ -10583,7 +10591,7 @@
           <p:cNvPr id="12" name="">
             <a:extLst xmlns:a="http://schemas.openxmlformats.org/drawingml/2006/main">
               <a:ext uri="{FF2B5EF4-FFF2-40B4-BE49-F238E27FC236}">
-                <a16:creationId xmlns:a16="http://schemas.microsoft.com/office/drawing/2014/main" id="{B6BA151D-60CE-4DF1-94C2-3E389DFF6498}"/>
+                <a16:creationId xmlns:a16="http://schemas.microsoft.com/office/drawing/2014/main" id="{B5007BCB-F82A-43F3-82B7-9947B6465422}"/>
               </a:ext>
             </a:extLst>
           </p:cNvPr>
@@ -10640,7 +10648,7 @@
           <p:cNvPr id="13" name="">
             <a:extLst xmlns:a="http://schemas.openxmlformats.org/drawingml/2006/main">
               <a:ext uri="{FF2B5EF4-FFF2-40B4-BE49-F238E27FC236}">
-                <a16:creationId xmlns:a16="http://schemas.microsoft.com/office/drawing/2014/main" id="{562D494E-BE97-4D03-BBEC-06CC77A59867}"/>
+                <a16:creationId xmlns:a16="http://schemas.microsoft.com/office/drawing/2014/main" id="{A711BE54-FCC1-4B4D-9339-019CE49497B4}"/>
               </a:ext>
             </a:extLst>
           </p:cNvPr>
@@ -10697,7 +10705,7 @@
           <p:cNvPr id="14" name="">
             <a:extLst xmlns:a="http://schemas.openxmlformats.org/drawingml/2006/main">
               <a:ext uri="{FF2B5EF4-FFF2-40B4-BE49-F238E27FC236}">
-                <a16:creationId xmlns:a16="http://schemas.microsoft.com/office/drawing/2014/main" id="{838B21A7-6F3F-4876-93AD-925CB6814BF5}"/>
+                <a16:creationId xmlns:a16="http://schemas.microsoft.com/office/drawing/2014/main" id="{3285C4D4-5BEF-430A-9B84-05CD894CF574}"/>
               </a:ext>
             </a:extLst>
           </p:cNvPr>
@@ -10754,7 +10762,7 @@
           <p:cNvPr id="15" name="">
             <a:extLst xmlns:a="http://schemas.openxmlformats.org/drawingml/2006/main">
               <a:ext uri="{FF2B5EF4-FFF2-40B4-BE49-F238E27FC236}">
-                <a16:creationId xmlns:a16="http://schemas.microsoft.com/office/drawing/2014/main" id="{E6D1CFE6-05FC-4B4A-8C2E-D151DD24CBB3}"/>
+                <a16:creationId xmlns:a16="http://schemas.microsoft.com/office/drawing/2014/main" id="{AE13F7E9-693F-4E99-A090-E7F17ED65F36}"/>
               </a:ext>
             </a:extLst>
           </p:cNvPr>
@@ -10809,7 +10817,7 @@
     </p:spTree>
     <p:extLst>
       <p:ext uri="{BB962C8B-B14F-4D97-AF65-F5344CB8AC3E}">
-        <p14:creationId xmlns:p14="http://schemas.microsoft.com/office/powerpoint/2010/main" val="2045198545"/>
+        <p14:creationId xmlns:p14="http://schemas.microsoft.com/office/powerpoint/2010/main" val="111701737"/>
       </p:ext>
     </p:extLst>
   </p:cSld>
@@ -10964,7 +10972,7 @@
           <p:cNvPr id="16" name="">
             <a:extLst xmlns:a="http://schemas.openxmlformats.org/drawingml/2006/main">
               <a:ext uri="{FF2B5EF4-FFF2-40B4-BE49-F238E27FC236}">
-                <a16:creationId xmlns:a16="http://schemas.microsoft.com/office/drawing/2014/main" id="{9CB09228-C26F-4BC9-81E9-BCE73A327115}"/>
+                <a16:creationId xmlns:a16="http://schemas.microsoft.com/office/drawing/2014/main" id="{32819FAC-001C-475B-A2B7-699B07E68D2C}"/>
               </a:ext>
             </a:extLst>
           </p:cNvPr>
@@ -10996,7 +11004,7 @@
           <p:cNvPr id="2" name="">
             <a:extLst xmlns:a="http://schemas.openxmlformats.org/drawingml/2006/main">
               <a:ext uri="{FF2B5EF4-FFF2-40B4-BE49-F238E27FC236}">
-                <a16:creationId xmlns:a16="http://schemas.microsoft.com/office/drawing/2014/main" id="{52C5E701-7D39-4DB1-A392-1D3EA3AB2C15}"/>
+                <a16:creationId xmlns:a16="http://schemas.microsoft.com/office/drawing/2014/main" id="{2B34299F-A288-4AE9-AE64-C4BCBD7B3EC7}"/>
               </a:ext>
             </a:extLst>
           </p:cNvPr>
@@ -11053,7 +11061,7 @@
           <p:cNvPr id="3" name="">
             <a:extLst xmlns:a="http://schemas.openxmlformats.org/drawingml/2006/main">
               <a:ext uri="{FF2B5EF4-FFF2-40B4-BE49-F238E27FC236}">
-                <a16:creationId xmlns:a16="http://schemas.microsoft.com/office/drawing/2014/main" id="{9362D269-9FAB-4C2C-B6B2-96C580F44054}"/>
+                <a16:creationId xmlns:a16="http://schemas.microsoft.com/office/drawing/2014/main" id="{715D5B6C-68E8-4066-BEA7-C04A5ECC2304}"/>
               </a:ext>
             </a:extLst>
           </p:cNvPr>
@@ -11085,7 +11093,7 @@
           <p:cNvPr id="4" name="">
             <a:extLst xmlns:a="http://schemas.openxmlformats.org/drawingml/2006/main">
               <a:ext uri="{FF2B5EF4-FFF2-40B4-BE49-F238E27FC236}">
-                <a16:creationId xmlns:a16="http://schemas.microsoft.com/office/drawing/2014/main" id="{364DC928-5D5C-410E-91DE-DEA46B11C9A1}"/>
+                <a16:creationId xmlns:a16="http://schemas.microsoft.com/office/drawing/2014/main" id="{7619CF7A-C02C-4FC6-A87B-F140226D2613}"/>
               </a:ext>
             </a:extLst>
           </p:cNvPr>
@@ -11142,7 +11150,7 @@
           <p:cNvPr id="5" name="">
             <a:extLst xmlns:a="http://schemas.openxmlformats.org/drawingml/2006/main">
               <a:ext uri="{FF2B5EF4-FFF2-40B4-BE49-F238E27FC236}">
-                <a16:creationId xmlns:a16="http://schemas.microsoft.com/office/drawing/2014/main" id="{836AC38C-BAE8-45C0-BA77-67F00DDCD1A8}"/>
+                <a16:creationId xmlns:a16="http://schemas.microsoft.com/office/drawing/2014/main" id="{C38EB1FB-A332-4094-887B-B1BDE2F228FF}"/>
               </a:ext>
             </a:extLst>
           </p:cNvPr>
@@ -11199,7 +11207,7 @@
           <p:cNvPr id="6" name="">
             <a:extLst xmlns:a="http://schemas.openxmlformats.org/drawingml/2006/main">
               <a:ext uri="{FF2B5EF4-FFF2-40B4-BE49-F238E27FC236}">
-                <a16:creationId xmlns:a16="http://schemas.microsoft.com/office/drawing/2014/main" id="{0EDF7DF5-21E4-42F4-BD6A-8FE7B5E92FBD}"/>
+                <a16:creationId xmlns:a16="http://schemas.microsoft.com/office/drawing/2014/main" id="{08887D47-BCA3-4B61-8A76-93ED8F866FDA}"/>
               </a:ext>
             </a:extLst>
           </p:cNvPr>
@@ -11256,7 +11264,7 @@
           <p:cNvPr id="7" name="">
             <a:extLst xmlns:a="http://schemas.openxmlformats.org/drawingml/2006/main">
               <a:ext uri="{FF2B5EF4-FFF2-40B4-BE49-F238E27FC236}">
-                <a16:creationId xmlns:a16="http://schemas.microsoft.com/office/drawing/2014/main" id="{93B1FCA8-058D-4DEE-94E5-466E6DF34138}"/>
+                <a16:creationId xmlns:a16="http://schemas.microsoft.com/office/drawing/2014/main" id="{CE58B60C-FBE5-4C12-A1BE-7A1544A526B3}"/>
               </a:ext>
             </a:extLst>
           </p:cNvPr>
@@ -11288,7 +11296,7 @@
           <p:cNvPr id="8" name="">
             <a:extLst xmlns:a="http://schemas.openxmlformats.org/drawingml/2006/main">
               <a:ext uri="{FF2B5EF4-FFF2-40B4-BE49-F238E27FC236}">
-                <a16:creationId xmlns:a16="http://schemas.microsoft.com/office/drawing/2014/main" id="{54172CA3-2B17-448F-933D-AD58D4A108DB}"/>
+                <a16:creationId xmlns:a16="http://schemas.microsoft.com/office/drawing/2014/main" id="{C8032C3C-D1AD-4668-BF5D-7B69424BE553}"/>
               </a:ext>
             </a:extLst>
           </p:cNvPr>
@@ -11345,7 +11353,7 @@
           <p:cNvPr id="9" name="">
             <a:extLst xmlns:a="http://schemas.openxmlformats.org/drawingml/2006/main">
               <a:ext uri="{FF2B5EF4-FFF2-40B4-BE49-F238E27FC236}">
-                <a16:creationId xmlns:a16="http://schemas.microsoft.com/office/drawing/2014/main" id="{C851AD5B-2D02-43AE-B5E2-95A880649CE1}"/>
+                <a16:creationId xmlns:a16="http://schemas.microsoft.com/office/drawing/2014/main" id="{65F6A656-FE32-4986-A9F4-241F17C466C9}"/>
               </a:ext>
             </a:extLst>
           </p:cNvPr>
@@ -11406,7 +11414,7 @@
           <p:nvPr/>
         </p:nvPicPr>
         <p:blipFill>
-          <a:blip xmlns:r="http://schemas.openxmlformats.org/officeDocument/2006/relationships" xmlns:a="http://schemas.openxmlformats.org/drawingml/2006/main" r:embed="R20a51c12714f42e2"/>
+          <a:blip xmlns:r="http://schemas.openxmlformats.org/officeDocument/2006/relationships" xmlns:a="http://schemas.openxmlformats.org/drawingml/2006/main" r:embed="R35690bf572224681"/>
           <a:stretch xmlns:a="http://schemas.openxmlformats.org/drawingml/2006/main"/>
         </p:blipFill>
         <p:spPr>
@@ -11424,7 +11432,7 @@
           <p:cNvPr id="11" name="">
             <a:extLst xmlns:a="http://schemas.openxmlformats.org/drawingml/2006/main">
               <a:ext uri="{FF2B5EF4-FFF2-40B4-BE49-F238E27FC236}">
-                <a16:creationId xmlns:a16="http://schemas.microsoft.com/office/drawing/2014/main" id="{D99BBE83-4EA4-4E4F-B0CD-F8E18954D8FB}"/>
+                <a16:creationId xmlns:a16="http://schemas.microsoft.com/office/drawing/2014/main" id="{AD253799-FB63-4EB6-A397-3A83FA1B6982}"/>
               </a:ext>
             </a:extLst>
           </p:cNvPr>
@@ -11481,7 +11489,7 @@
           <p:cNvPr id="12" name="">
             <a:extLst xmlns:a="http://schemas.openxmlformats.org/drawingml/2006/main">
               <a:ext uri="{FF2B5EF4-FFF2-40B4-BE49-F238E27FC236}">
-                <a16:creationId xmlns:a16="http://schemas.microsoft.com/office/drawing/2014/main" id="{1CF0020C-6011-4848-B9C0-AB173BE20E10}"/>
+                <a16:creationId xmlns:a16="http://schemas.microsoft.com/office/drawing/2014/main" id="{68C0548A-7DB3-49D5-95CD-C7E134EE15B3}"/>
               </a:ext>
             </a:extLst>
           </p:cNvPr>
@@ -11538,7 +11546,7 @@
           <p:cNvPr id="13" name="">
             <a:extLst xmlns:a="http://schemas.openxmlformats.org/drawingml/2006/main">
               <a:ext uri="{FF2B5EF4-FFF2-40B4-BE49-F238E27FC236}">
-                <a16:creationId xmlns:a16="http://schemas.microsoft.com/office/drawing/2014/main" id="{3EA05EEB-E3A4-48F2-A116-E53477BCCE79}"/>
+                <a16:creationId xmlns:a16="http://schemas.microsoft.com/office/drawing/2014/main" id="{9F5092DF-EB38-4DF2-A357-A8AD2D75BCCB}"/>
               </a:ext>
             </a:extLst>
           </p:cNvPr>
@@ -11570,7 +11578,7 @@
           <p:cNvPr id="14" name="">
             <a:extLst xmlns:a="http://schemas.openxmlformats.org/drawingml/2006/main">
               <a:ext uri="{FF2B5EF4-FFF2-40B4-BE49-F238E27FC236}">
-                <a16:creationId xmlns:a16="http://schemas.microsoft.com/office/drawing/2014/main" id="{B6C5C7A3-B3EA-4875-9257-3F50368859C2}"/>
+                <a16:creationId xmlns:a16="http://schemas.microsoft.com/office/drawing/2014/main" id="{7646B2CE-3782-4A22-8858-818E2B67D075}"/>
               </a:ext>
             </a:extLst>
           </p:cNvPr>
@@ -11627,7 +11635,7 @@
           <p:cNvPr id="15" name="">
             <a:extLst xmlns:a="http://schemas.openxmlformats.org/drawingml/2006/main">
               <a:ext uri="{FF2B5EF4-FFF2-40B4-BE49-F238E27FC236}">
-                <a16:creationId xmlns:a16="http://schemas.microsoft.com/office/drawing/2014/main" id="{E4532896-3FBD-4E47-A131-51ABC9687B65}"/>
+                <a16:creationId xmlns:a16="http://schemas.microsoft.com/office/drawing/2014/main" id="{E951EB4E-418D-420F-8D80-D3A28F596BC6}"/>
               </a:ext>
             </a:extLst>
           </p:cNvPr>
@@ -11682,7 +11690,7 @@
     </p:spTree>
     <p:extLst>
       <p:ext uri="{BB962C8B-B14F-4D97-AF65-F5344CB8AC3E}">
-        <p14:creationId xmlns:p14="http://schemas.microsoft.com/office/powerpoint/2010/main" val="1331566130"/>
+        <p14:creationId xmlns:p14="http://schemas.microsoft.com/office/powerpoint/2010/main" val="1703606199"/>
       </p:ext>
     </p:extLst>
   </p:cSld>
@@ -11837,7 +11845,7 @@
           <p:cNvPr id="23" name="">
             <a:extLst xmlns:a="http://schemas.openxmlformats.org/drawingml/2006/main">
               <a:ext uri="{FF2B5EF4-FFF2-40B4-BE49-F238E27FC236}">
-                <a16:creationId xmlns:a16="http://schemas.microsoft.com/office/drawing/2014/main" id="{07EC1CDA-5222-48BE-88E4-847078B84255}"/>
+                <a16:creationId xmlns:a16="http://schemas.microsoft.com/office/drawing/2014/main" id="{1FE18865-3A24-4A8D-A609-376F89977508}"/>
               </a:ext>
             </a:extLst>
           </p:cNvPr>
@@ -11869,7 +11877,7 @@
           <p:cNvPr id="2" name="">
             <a:extLst xmlns:a="http://schemas.openxmlformats.org/drawingml/2006/main">
               <a:ext uri="{FF2B5EF4-FFF2-40B4-BE49-F238E27FC236}">
-                <a16:creationId xmlns:a16="http://schemas.microsoft.com/office/drawing/2014/main" id="{0C8F0D2E-269C-42F1-8523-E89269CB6CE4}"/>
+                <a16:creationId xmlns:a16="http://schemas.microsoft.com/office/drawing/2014/main" id="{1B64040F-ECF6-41AC-95DE-4AF0F27149F2}"/>
               </a:ext>
             </a:extLst>
           </p:cNvPr>
@@ -11926,7 +11934,7 @@
           <p:cNvPr id="3" name="">
             <a:extLst xmlns:a="http://schemas.openxmlformats.org/drawingml/2006/main">
               <a:ext uri="{FF2B5EF4-FFF2-40B4-BE49-F238E27FC236}">
-                <a16:creationId xmlns:a16="http://schemas.microsoft.com/office/drawing/2014/main" id="{FA826CAB-F350-4D48-914D-A2D473DA9A94}"/>
+                <a16:creationId xmlns:a16="http://schemas.microsoft.com/office/drawing/2014/main" id="{7C92D093-D835-4109-B128-9CAB909AD21A}"/>
               </a:ext>
             </a:extLst>
           </p:cNvPr>
@@ -11958,7 +11966,7 @@
           <p:cNvPr id="4" name="">
             <a:extLst xmlns:a="http://schemas.openxmlformats.org/drawingml/2006/main">
               <a:ext uri="{FF2B5EF4-FFF2-40B4-BE49-F238E27FC236}">
-                <a16:creationId xmlns:a16="http://schemas.microsoft.com/office/drawing/2014/main" id="{7E7910CA-F028-4070-B076-4E8EBB035EE0}"/>
+                <a16:creationId xmlns:a16="http://schemas.microsoft.com/office/drawing/2014/main" id="{02B74D19-172A-4BF8-A9A1-75A4FEC05230}"/>
               </a:ext>
             </a:extLst>
           </p:cNvPr>
@@ -12015,7 +12023,7 @@
           <p:cNvPr id="5" name="">
             <a:extLst xmlns:a="http://schemas.openxmlformats.org/drawingml/2006/main">
               <a:ext uri="{FF2B5EF4-FFF2-40B4-BE49-F238E27FC236}">
-                <a16:creationId xmlns:a16="http://schemas.microsoft.com/office/drawing/2014/main" id="{D6FA788B-067E-4F6F-A9AB-27C304008B45}"/>
+                <a16:creationId xmlns:a16="http://schemas.microsoft.com/office/drawing/2014/main" id="{03A118DB-3E29-4B8C-8043-947B2C479223}"/>
               </a:ext>
             </a:extLst>
           </p:cNvPr>
@@ -12072,7 +12080,7 @@
           <p:cNvPr id="6" name="">
             <a:extLst xmlns:a="http://schemas.openxmlformats.org/drawingml/2006/main">
               <a:ext uri="{FF2B5EF4-FFF2-40B4-BE49-F238E27FC236}">
-                <a16:creationId xmlns:a16="http://schemas.microsoft.com/office/drawing/2014/main" id="{4A307699-52DA-4295-93F1-9EA0CE85F01A}"/>
+                <a16:creationId xmlns:a16="http://schemas.microsoft.com/office/drawing/2014/main" id="{CBEEDA99-EA04-4B36-B1EA-2024E51240B4}"/>
               </a:ext>
             </a:extLst>
           </p:cNvPr>
@@ -12129,7 +12137,7 @@
           <p:cNvPr id="7" name="">
             <a:extLst xmlns:a="http://schemas.openxmlformats.org/drawingml/2006/main">
               <a:ext uri="{FF2B5EF4-FFF2-40B4-BE49-F238E27FC236}">
-                <a16:creationId xmlns:a16="http://schemas.microsoft.com/office/drawing/2014/main" id="{83A2B1D1-A0DE-4B66-BB70-E9B4E2A22F01}"/>
+                <a16:creationId xmlns:a16="http://schemas.microsoft.com/office/drawing/2014/main" id="{AF3DD1A7-09BF-4B41-BD9C-14F18462DF84}"/>
               </a:ext>
             </a:extLst>
           </p:cNvPr>
@@ -12161,7 +12169,7 @@
           <p:cNvPr id="8" name="">
             <a:extLst xmlns:a="http://schemas.openxmlformats.org/drawingml/2006/main">
               <a:ext uri="{FF2B5EF4-FFF2-40B4-BE49-F238E27FC236}">
-                <a16:creationId xmlns:a16="http://schemas.microsoft.com/office/drawing/2014/main" id="{7AB80795-838E-4557-9963-847B4F92ABBB}"/>
+                <a16:creationId xmlns:a16="http://schemas.microsoft.com/office/drawing/2014/main" id="{90CACBE8-1D2F-464E-8CD4-B23A2E797DF7}"/>
               </a:ext>
             </a:extLst>
           </p:cNvPr>
@@ -12218,7 +12226,7 @@
           <p:cNvPr id="9" name="">
             <a:extLst xmlns:a="http://schemas.openxmlformats.org/drawingml/2006/main">
               <a:ext uri="{FF2B5EF4-FFF2-40B4-BE49-F238E27FC236}">
-                <a16:creationId xmlns:a16="http://schemas.microsoft.com/office/drawing/2014/main" id="{66126E7C-3AE0-4EA3-8880-F67608C2F58F}"/>
+                <a16:creationId xmlns:a16="http://schemas.microsoft.com/office/drawing/2014/main" id="{72585608-D14A-4B9A-ACDB-5FC97FC91424}"/>
               </a:ext>
             </a:extLst>
           </p:cNvPr>
@@ -12275,7 +12283,7 @@
           <p:cNvPr id="10" name="">
             <a:extLst xmlns:a="http://schemas.openxmlformats.org/drawingml/2006/main">
               <a:ext uri="{FF2B5EF4-FFF2-40B4-BE49-F238E27FC236}">
-                <a16:creationId xmlns:a16="http://schemas.microsoft.com/office/drawing/2014/main" id="{1AFC0861-5852-4B28-95D8-5CEBA069904B}"/>
+                <a16:creationId xmlns:a16="http://schemas.microsoft.com/office/drawing/2014/main" id="{8F71F854-0F70-47F2-BA84-9C76D564BFDB}"/>
               </a:ext>
             </a:extLst>
           </p:cNvPr>
@@ -12309,7 +12317,7 @@
           <p:cNvPr id="11" name="">
             <a:extLst xmlns:a="http://schemas.openxmlformats.org/drawingml/2006/main">
               <a:ext uri="{FF2B5EF4-FFF2-40B4-BE49-F238E27FC236}">
-                <a16:creationId xmlns:a16="http://schemas.microsoft.com/office/drawing/2014/main" id="{8C8AFD89-86CE-4D07-A475-779F5B9C32B8}"/>
+                <a16:creationId xmlns:a16="http://schemas.microsoft.com/office/drawing/2014/main" id="{80D51EEF-87F2-483A-9E0B-166C89DED77A}"/>
               </a:ext>
             </a:extLst>
           </p:cNvPr>
@@ -12341,7 +12349,7 @@
           <p:cNvPr id="12" name="">
             <a:extLst xmlns:a="http://schemas.openxmlformats.org/drawingml/2006/main">
               <a:ext uri="{FF2B5EF4-FFF2-40B4-BE49-F238E27FC236}">
-                <a16:creationId xmlns:a16="http://schemas.microsoft.com/office/drawing/2014/main" id="{1368C832-15C5-4C5C-B7DF-55C607685127}"/>
+                <a16:creationId xmlns:a16="http://schemas.microsoft.com/office/drawing/2014/main" id="{BE3A90E1-778D-43A8-9923-093DF65CD9F6}"/>
               </a:ext>
             </a:extLst>
           </p:cNvPr>
@@ -12398,7 +12406,7 @@
           <p:cNvPr id="13" name="">
             <a:extLst xmlns:a="http://schemas.openxmlformats.org/drawingml/2006/main">
               <a:ext uri="{FF2B5EF4-FFF2-40B4-BE49-F238E27FC236}">
-                <a16:creationId xmlns:a16="http://schemas.microsoft.com/office/drawing/2014/main" id="{267D5CDD-8DE6-4BB9-A10F-DCCAA9B52557}"/>
+                <a16:creationId xmlns:a16="http://schemas.microsoft.com/office/drawing/2014/main" id="{1CCD81AE-9091-422C-BA28-AA9BC58B4684}"/>
               </a:ext>
             </a:extLst>
           </p:cNvPr>
@@ -12455,7 +12463,7 @@
           <p:cNvPr id="14" name="">
             <a:extLst xmlns:a="http://schemas.openxmlformats.org/drawingml/2006/main">
               <a:ext uri="{FF2B5EF4-FFF2-40B4-BE49-F238E27FC236}">
-                <a16:creationId xmlns:a16="http://schemas.microsoft.com/office/drawing/2014/main" id="{8B8B5B1D-BCA7-4905-83BF-F871072DA411}"/>
+                <a16:creationId xmlns:a16="http://schemas.microsoft.com/office/drawing/2014/main" id="{20B15780-0FB4-4D51-8BD8-4176840724D6}"/>
               </a:ext>
             </a:extLst>
           </p:cNvPr>
@@ -12489,7 +12497,7 @@
           <p:cNvPr id="15" name="">
             <a:extLst xmlns:a="http://schemas.openxmlformats.org/drawingml/2006/main">
               <a:ext uri="{FF2B5EF4-FFF2-40B4-BE49-F238E27FC236}">
-                <a16:creationId xmlns:a16="http://schemas.microsoft.com/office/drawing/2014/main" id="{E0B0B3AA-2A91-4885-B4AF-93E15E9FB36B}"/>
+                <a16:creationId xmlns:a16="http://schemas.microsoft.com/office/drawing/2014/main" id="{BA0328F1-342D-4FD5-82B4-7C7B92E1474B}"/>
               </a:ext>
             </a:extLst>
           </p:cNvPr>
@@ -12521,7 +12529,7 @@
           <p:cNvPr id="16" name="">
             <a:extLst xmlns:a="http://schemas.openxmlformats.org/drawingml/2006/main">
               <a:ext uri="{FF2B5EF4-FFF2-40B4-BE49-F238E27FC236}">
-                <a16:creationId xmlns:a16="http://schemas.microsoft.com/office/drawing/2014/main" id="{DFE71BEB-E606-45E5-A6A9-AE1025FB7CBF}"/>
+                <a16:creationId xmlns:a16="http://schemas.microsoft.com/office/drawing/2014/main" id="{19ADEB9D-C956-49BF-AF69-7F966C2B03BA}"/>
               </a:ext>
             </a:extLst>
           </p:cNvPr>
@@ -12578,7 +12586,7 @@
           <p:cNvPr id="17" name="">
             <a:extLst xmlns:a="http://schemas.openxmlformats.org/drawingml/2006/main">
               <a:ext uri="{FF2B5EF4-FFF2-40B4-BE49-F238E27FC236}">
-                <a16:creationId xmlns:a16="http://schemas.microsoft.com/office/drawing/2014/main" id="{85C5408C-B47D-4FB4-97DB-543AAFE741AB}"/>
+                <a16:creationId xmlns:a16="http://schemas.microsoft.com/office/drawing/2014/main" id="{C6A7B1C5-B4FC-41D8-9404-5CA5E6C879D8}"/>
               </a:ext>
             </a:extLst>
           </p:cNvPr>
@@ -12635,7 +12643,7 @@
           <p:cNvPr id="18" name="">
             <a:extLst xmlns:a="http://schemas.openxmlformats.org/drawingml/2006/main">
               <a:ext uri="{FF2B5EF4-FFF2-40B4-BE49-F238E27FC236}">
-                <a16:creationId xmlns:a16="http://schemas.microsoft.com/office/drawing/2014/main" id="{E2F73E00-CAB2-4478-A57D-4872B14AC4DC}"/>
+                <a16:creationId xmlns:a16="http://schemas.microsoft.com/office/drawing/2014/main" id="{6FFF7009-2724-4DFC-8746-98AA293546E0}"/>
               </a:ext>
             </a:extLst>
           </p:cNvPr>
@@ -12669,7 +12677,7 @@
           <p:cNvPr id="19" name="">
             <a:extLst xmlns:a="http://schemas.openxmlformats.org/drawingml/2006/main">
               <a:ext uri="{FF2B5EF4-FFF2-40B4-BE49-F238E27FC236}">
-                <a16:creationId xmlns:a16="http://schemas.microsoft.com/office/drawing/2014/main" id="{EABA4109-F223-4FCA-B437-2226A42FFE05}"/>
+                <a16:creationId xmlns:a16="http://schemas.microsoft.com/office/drawing/2014/main" id="{DDB8BBA5-EED4-4811-8C44-2DEC03818E42}"/>
               </a:ext>
             </a:extLst>
           </p:cNvPr>
@@ -12701,7 +12709,7 @@
           <p:cNvPr id="20" name="">
             <a:extLst xmlns:a="http://schemas.openxmlformats.org/drawingml/2006/main">
               <a:ext uri="{FF2B5EF4-FFF2-40B4-BE49-F238E27FC236}">
-                <a16:creationId xmlns:a16="http://schemas.microsoft.com/office/drawing/2014/main" id="{0F4E53EE-1429-474E-82BF-66A573FA4A88}"/>
+                <a16:creationId xmlns:a16="http://schemas.microsoft.com/office/drawing/2014/main" id="{FF06EF15-5B26-413A-A361-4E33F47FA7C1}"/>
               </a:ext>
             </a:extLst>
           </p:cNvPr>
@@ -12758,7 +12766,7 @@
           <p:cNvPr id="21" name="">
             <a:extLst xmlns:a="http://schemas.openxmlformats.org/drawingml/2006/main">
               <a:ext uri="{FF2B5EF4-FFF2-40B4-BE49-F238E27FC236}">
-                <a16:creationId xmlns:a16="http://schemas.microsoft.com/office/drawing/2014/main" id="{B5CF1922-E72E-4ED9-9060-DF0358DF19FC}"/>
+                <a16:creationId xmlns:a16="http://schemas.microsoft.com/office/drawing/2014/main" id="{20BF3478-BEA2-412A-984A-22730D1BF88D}"/>
               </a:ext>
             </a:extLst>
           </p:cNvPr>
@@ -12815,7 +12823,7 @@
           <p:cNvPr id="22" name="">
             <a:extLst xmlns:a="http://schemas.openxmlformats.org/drawingml/2006/main">
               <a:ext uri="{FF2B5EF4-FFF2-40B4-BE49-F238E27FC236}">
-                <a16:creationId xmlns:a16="http://schemas.microsoft.com/office/drawing/2014/main" id="{D87BBF61-4F61-4E40-A109-26E51D0B448A}"/>
+                <a16:creationId xmlns:a16="http://schemas.microsoft.com/office/drawing/2014/main" id="{3785A319-E748-4C53-AB70-3422FA830FCE}"/>
               </a:ext>
             </a:extLst>
           </p:cNvPr>
@@ -12870,7 +12878,7 @@
     </p:spTree>
     <p:extLst>
       <p:ext uri="{BB962C8B-B14F-4D97-AF65-F5344CB8AC3E}">
-        <p14:creationId xmlns:p14="http://schemas.microsoft.com/office/powerpoint/2010/main" val="1318404335"/>
+        <p14:creationId xmlns:p14="http://schemas.microsoft.com/office/powerpoint/2010/main" val="1386074978"/>
       </p:ext>
     </p:extLst>
   </p:cSld>
@@ -13071,7 +13079,7 @@
           <p:cNvPr id="22" name="">
             <a:extLst xmlns:a="http://schemas.openxmlformats.org/drawingml/2006/main">
               <a:ext uri="{FF2B5EF4-FFF2-40B4-BE49-F238E27FC236}">
-                <a16:creationId xmlns:a16="http://schemas.microsoft.com/office/drawing/2014/main" id="{DC1AADC1-7314-48A5-A201-A7249CA3A48A}"/>
+                <a16:creationId xmlns:a16="http://schemas.microsoft.com/office/drawing/2014/main" id="{40AA11D0-1A1D-4C48-B78F-83FCDBB3295D}"/>
               </a:ext>
             </a:extLst>
           </p:cNvPr>
@@ -13103,7 +13111,7 @@
           <p:cNvPr id="2" name="">
             <a:extLst xmlns:a="http://schemas.openxmlformats.org/drawingml/2006/main">
               <a:ext uri="{FF2B5EF4-FFF2-40B4-BE49-F238E27FC236}">
-                <a16:creationId xmlns:a16="http://schemas.microsoft.com/office/drawing/2014/main" id="{F5D1C947-B585-4EB9-A214-041C1A814738}"/>
+                <a16:creationId xmlns:a16="http://schemas.microsoft.com/office/drawing/2014/main" id="{1A8D7AF2-5565-42AB-BFCA-5246F3CE6C93}"/>
               </a:ext>
             </a:extLst>
           </p:cNvPr>
@@ -13160,7 +13168,7 @@
           <p:cNvPr id="3" name="">
             <a:extLst xmlns:a="http://schemas.openxmlformats.org/drawingml/2006/main">
               <a:ext uri="{FF2B5EF4-FFF2-40B4-BE49-F238E27FC236}">
-                <a16:creationId xmlns:a16="http://schemas.microsoft.com/office/drawing/2014/main" id="{CCEC4841-7F80-49BA-8DD2-A478E5E9A503}"/>
+                <a16:creationId xmlns:a16="http://schemas.microsoft.com/office/drawing/2014/main" id="{3748CDE2-D8B3-4201-A6EC-817744CDAC9F}"/>
               </a:ext>
             </a:extLst>
           </p:cNvPr>
@@ -13192,7 +13200,7 @@
           <p:cNvPr id="4" name="">
             <a:extLst xmlns:a="http://schemas.openxmlformats.org/drawingml/2006/main">
               <a:ext uri="{FF2B5EF4-FFF2-40B4-BE49-F238E27FC236}">
-                <a16:creationId xmlns:a16="http://schemas.microsoft.com/office/drawing/2014/main" id="{F558FE06-CDA1-46EC-8E7C-D3B44613079F}"/>
+                <a16:creationId xmlns:a16="http://schemas.microsoft.com/office/drawing/2014/main" id="{48563FB2-BC4D-4F4A-8E20-E6F5456AC588}"/>
               </a:ext>
             </a:extLst>
           </p:cNvPr>
@@ -13249,7 +13257,7 @@
           <p:cNvPr id="5" name="">
             <a:extLst xmlns:a="http://schemas.openxmlformats.org/drawingml/2006/main">
               <a:ext uri="{FF2B5EF4-FFF2-40B4-BE49-F238E27FC236}">
-                <a16:creationId xmlns:a16="http://schemas.microsoft.com/office/drawing/2014/main" id="{7935CB2A-C1F9-4673-BFBE-DE939E846806}"/>
+                <a16:creationId xmlns:a16="http://schemas.microsoft.com/office/drawing/2014/main" id="{CF2D5EE3-2C6B-4531-BA62-6D98B21A8FAF}"/>
               </a:ext>
             </a:extLst>
           </p:cNvPr>
@@ -13306,7 +13314,7 @@
           <p:cNvPr id="6" name="">
             <a:extLst xmlns:a="http://schemas.openxmlformats.org/drawingml/2006/main">
               <a:ext uri="{FF2B5EF4-FFF2-40B4-BE49-F238E27FC236}">
-                <a16:creationId xmlns:a16="http://schemas.microsoft.com/office/drawing/2014/main" id="{B325579B-0185-4FA4-8A56-BC2C1F4CBCED}"/>
+                <a16:creationId xmlns:a16="http://schemas.microsoft.com/office/drawing/2014/main" id="{773DCADA-75A1-4021-8121-80A506E28C7B}"/>
               </a:ext>
             </a:extLst>
           </p:cNvPr>
@@ -13363,7 +13371,7 @@
           <p:cNvPr id="7" name="">
             <a:extLst xmlns:a="http://schemas.openxmlformats.org/drawingml/2006/main">
               <a:ext uri="{FF2B5EF4-FFF2-40B4-BE49-F238E27FC236}">
-                <a16:creationId xmlns:a16="http://schemas.microsoft.com/office/drawing/2014/main" id="{2A9C81B4-5EDF-4D1E-B936-7AC4FA1B7E1E}"/>
+                <a16:creationId xmlns:a16="http://schemas.microsoft.com/office/drawing/2014/main" id="{DB512BF2-2AE7-42A4-A7E0-A4FFF313C7C7}"/>
               </a:ext>
             </a:extLst>
           </p:cNvPr>
@@ -13395,7 +13403,7 @@
           <p:cNvPr id="8" name="">
             <a:extLst xmlns:a="http://schemas.openxmlformats.org/drawingml/2006/main">
               <a:ext uri="{FF2B5EF4-FFF2-40B4-BE49-F238E27FC236}">
-                <a16:creationId xmlns:a16="http://schemas.microsoft.com/office/drawing/2014/main" id="{9F711019-93DD-48D9-BD39-7CC5945BDDD3}"/>
+                <a16:creationId xmlns:a16="http://schemas.microsoft.com/office/drawing/2014/main" id="{85853822-EB9D-46FF-AA01-D4141CC0D783}"/>
               </a:ext>
             </a:extLst>
           </p:cNvPr>
@@ -13452,7 +13460,7 @@
           <p:cNvPr id="9" name="">
             <a:extLst xmlns:a="http://schemas.openxmlformats.org/drawingml/2006/main">
               <a:ext uri="{FF2B5EF4-FFF2-40B4-BE49-F238E27FC236}">
-                <a16:creationId xmlns:a16="http://schemas.microsoft.com/office/drawing/2014/main" id="{C0FB6C51-7402-4780-A362-493DA45CD8EB}"/>
+                <a16:creationId xmlns:a16="http://schemas.microsoft.com/office/drawing/2014/main" id="{EC38CAC8-D794-45B2-A4BC-614E35FF0471}"/>
               </a:ext>
             </a:extLst>
           </p:cNvPr>
@@ -13509,7 +13517,7 @@
           <p:cNvPr id="10" name="">
             <a:extLst xmlns:a="http://schemas.openxmlformats.org/drawingml/2006/main">
               <a:ext uri="{FF2B5EF4-FFF2-40B4-BE49-F238E27FC236}">
-                <a16:creationId xmlns:a16="http://schemas.microsoft.com/office/drawing/2014/main" id="{2B04768B-3CAE-4A39-808A-79FE47F906E6}"/>
+                <a16:creationId xmlns:a16="http://schemas.microsoft.com/office/drawing/2014/main" id="{F832F617-2D5E-478A-BBD1-9FAB7ED547B8}"/>
               </a:ext>
             </a:extLst>
           </p:cNvPr>
@@ -13543,7 +13551,7 @@
           <p:cNvPr id="11" name="">
             <a:extLst xmlns:a="http://schemas.openxmlformats.org/drawingml/2006/main">
               <a:ext uri="{FF2B5EF4-FFF2-40B4-BE49-F238E27FC236}">
-                <a16:creationId xmlns:a16="http://schemas.microsoft.com/office/drawing/2014/main" id="{D1A781A1-8574-4716-B6A0-122743960FB1}"/>
+                <a16:creationId xmlns:a16="http://schemas.microsoft.com/office/drawing/2014/main" id="{A89FA9D8-8142-4E9A-B88C-9F8D344C6865}"/>
               </a:ext>
             </a:extLst>
           </p:cNvPr>
@@ -13575,7 +13583,7 @@
           <p:cNvPr id="12" name="">
             <a:extLst xmlns:a="http://schemas.openxmlformats.org/drawingml/2006/main">
               <a:ext uri="{FF2B5EF4-FFF2-40B4-BE49-F238E27FC236}">
-                <a16:creationId xmlns:a16="http://schemas.microsoft.com/office/drawing/2014/main" id="{6F9470CA-02AE-4260-8FAD-842DCE4E7E8E}"/>
+                <a16:creationId xmlns:a16="http://schemas.microsoft.com/office/drawing/2014/main" id="{451E7316-4263-41B1-BA97-1A3D617F647F}"/>
               </a:ext>
             </a:extLst>
           </p:cNvPr>
@@ -13632,7 +13640,7 @@
           <p:cNvPr id="13" name="">
             <a:extLst xmlns:a="http://schemas.openxmlformats.org/drawingml/2006/main">
               <a:ext uri="{FF2B5EF4-FFF2-40B4-BE49-F238E27FC236}">
-                <a16:creationId xmlns:a16="http://schemas.microsoft.com/office/drawing/2014/main" id="{E4EEDF41-07BB-41D0-B85B-49B91AC43D44}"/>
+                <a16:creationId xmlns:a16="http://schemas.microsoft.com/office/drawing/2014/main" id="{041521E9-D6DB-47DF-A5EE-28F9064DBAB6}"/>
               </a:ext>
             </a:extLst>
           </p:cNvPr>
@@ -13689,7 +13697,7 @@
           <p:cNvPr id="14" name="">
             <a:extLst xmlns:a="http://schemas.openxmlformats.org/drawingml/2006/main">
               <a:ext uri="{FF2B5EF4-FFF2-40B4-BE49-F238E27FC236}">
-                <a16:creationId xmlns:a16="http://schemas.microsoft.com/office/drawing/2014/main" id="{3F3D8787-91B0-49B3-B516-77453A0F98F9}"/>
+                <a16:creationId xmlns:a16="http://schemas.microsoft.com/office/drawing/2014/main" id="{0095CD2C-89FA-4926-8CFE-8237B6FD17D2}"/>
               </a:ext>
             </a:extLst>
           </p:cNvPr>
@@ -13723,7 +13731,7 @@
           <p:cNvPr id="15" name="">
             <a:extLst xmlns:a="http://schemas.openxmlformats.org/drawingml/2006/main">
               <a:ext uri="{FF2B5EF4-FFF2-40B4-BE49-F238E27FC236}">
-                <a16:creationId xmlns:a16="http://schemas.microsoft.com/office/drawing/2014/main" id="{3D13117D-B66B-4522-956C-27561C0425A0}"/>
+                <a16:creationId xmlns:a16="http://schemas.microsoft.com/office/drawing/2014/main" id="{75FBB90F-A00C-4A29-A453-8EFD8034CD99}"/>
               </a:ext>
             </a:extLst>
           </p:cNvPr>
@@ -13755,7 +13763,7 @@
           <p:cNvPr id="16" name="">
             <a:extLst xmlns:a="http://schemas.openxmlformats.org/drawingml/2006/main">
               <a:ext uri="{FF2B5EF4-FFF2-40B4-BE49-F238E27FC236}">
-                <a16:creationId xmlns:a16="http://schemas.microsoft.com/office/drawing/2014/main" id="{548DFE37-A915-4A01-BB56-888E372ED31A}"/>
+                <a16:creationId xmlns:a16="http://schemas.microsoft.com/office/drawing/2014/main" id="{11C397E9-02CD-4A59-9286-170854E317C0}"/>
               </a:ext>
             </a:extLst>
           </p:cNvPr>
@@ -13812,7 +13820,7 @@
           <p:cNvPr id="17" name="">
             <a:extLst xmlns:a="http://schemas.openxmlformats.org/drawingml/2006/main">
               <a:ext uri="{FF2B5EF4-FFF2-40B4-BE49-F238E27FC236}">
-                <a16:creationId xmlns:a16="http://schemas.microsoft.com/office/drawing/2014/main" id="{EA0F5BA1-64E5-4AF3-9487-71D9BE050712}"/>
+                <a16:creationId xmlns:a16="http://schemas.microsoft.com/office/drawing/2014/main" id="{B448CF4C-1777-4DA2-BC1D-764B61ED13D0}"/>
               </a:ext>
             </a:extLst>
           </p:cNvPr>
@@ -13869,7 +13877,7 @@
           <p:cNvPr id="18" name="">
             <a:extLst xmlns:a="http://schemas.openxmlformats.org/drawingml/2006/main">
               <a:ext uri="{FF2B5EF4-FFF2-40B4-BE49-F238E27FC236}">
-                <a16:creationId xmlns:a16="http://schemas.microsoft.com/office/drawing/2014/main" id="{D0B09A30-0368-4D03-94A3-59662DBBE7FD}"/>
+                <a16:creationId xmlns:a16="http://schemas.microsoft.com/office/drawing/2014/main" id="{2D05D94C-282F-4707-811D-861C08281AE5}"/>
               </a:ext>
             </a:extLst>
           </p:cNvPr>
@@ -13903,7 +13911,7 @@
           <p:cNvPr id="19" name="">
             <a:extLst xmlns:a="http://schemas.openxmlformats.org/drawingml/2006/main">
               <a:ext uri="{FF2B5EF4-FFF2-40B4-BE49-F238E27FC236}">
-                <a16:creationId xmlns:a16="http://schemas.microsoft.com/office/drawing/2014/main" id="{F00AF317-9FEE-4BAE-BA97-A029B5C79F41}"/>
+                <a16:creationId xmlns:a16="http://schemas.microsoft.com/office/drawing/2014/main" id="{C4011225-73BB-4CB4-ADC8-BB09345CE3FE}"/>
               </a:ext>
             </a:extLst>
           </p:cNvPr>
@@ -13935,7 +13943,7 @@
           <p:cNvPr id="20" name="">
             <a:extLst xmlns:a="http://schemas.openxmlformats.org/drawingml/2006/main">
               <a:ext uri="{FF2B5EF4-FFF2-40B4-BE49-F238E27FC236}">
-                <a16:creationId xmlns:a16="http://schemas.microsoft.com/office/drawing/2014/main" id="{D1483D32-AE5A-4535-BF1F-86153FF325F5}"/>
+                <a16:creationId xmlns:a16="http://schemas.microsoft.com/office/drawing/2014/main" id="{E7D94ECA-7EF6-4A42-A0F6-4644D437BE8B}"/>
               </a:ext>
             </a:extLst>
           </p:cNvPr>
@@ -13992,7 +14000,7 @@
           <p:cNvPr id="21" name="">
             <a:extLst xmlns:a="http://schemas.openxmlformats.org/drawingml/2006/main">
               <a:ext uri="{FF2B5EF4-FFF2-40B4-BE49-F238E27FC236}">
-                <a16:creationId xmlns:a16="http://schemas.microsoft.com/office/drawing/2014/main" id="{681B66E1-5DD9-4A2C-B567-EE0673F9172D}"/>
+                <a16:creationId xmlns:a16="http://schemas.microsoft.com/office/drawing/2014/main" id="{5045B498-8C31-463E-A3D4-B93AD1ACF277}"/>
               </a:ext>
             </a:extLst>
           </p:cNvPr>
@@ -14047,7 +14055,7 @@
     </p:spTree>
     <p:extLst>
       <p:ext uri="{BB962C8B-B14F-4D97-AF65-F5344CB8AC3E}">
-        <p14:creationId xmlns:p14="http://schemas.microsoft.com/office/powerpoint/2010/main" val="1704612807"/>
+        <p14:creationId xmlns:p14="http://schemas.microsoft.com/office/powerpoint/2010/main" val="269253710"/>
       </p:ext>
     </p:extLst>
   </p:cSld>
